--- a/docs/plots/grant/jx_grant_linsubhr_diff_grade3.pptx
+++ b/docs/plots/grant/jx_grant_linsubhr_diff_grade3.pptx
@@ -2271,7 +2271,7 @@
           </p:nvSpPr>
           <p:spPr>
             <a:xfrm>
-              <a:off x="915645" y="5038294"/>
+              <a:off x="915645" y="5067975"/>
               <a:ext cx="7682587" cy="0"/>
             </a:xfrm>
             <a:custGeom>
@@ -2314,7 +2314,7 @@
           </p:nvSpPr>
           <p:spPr>
             <a:xfrm>
-              <a:off x="915645" y="4273666"/>
+              <a:off x="915645" y="4288924"/>
               <a:ext cx="7682587" cy="0"/>
             </a:xfrm>
             <a:custGeom>
@@ -2357,7 +2357,7 @@
           </p:nvSpPr>
           <p:spPr>
             <a:xfrm>
-              <a:off x="915645" y="3509037"/>
+              <a:off x="915645" y="3509873"/>
               <a:ext cx="7682587" cy="0"/>
             </a:xfrm>
             <a:custGeom>
@@ -2400,7 +2400,7 @@
           </p:nvSpPr>
           <p:spPr>
             <a:xfrm>
-              <a:off x="915645" y="2744409"/>
+              <a:off x="915645" y="2730822"/>
               <a:ext cx="7682587" cy="0"/>
             </a:xfrm>
             <a:custGeom>
@@ -2443,15 +2443,15 @@
           </p:nvSpPr>
           <p:spPr>
             <a:xfrm>
-              <a:off x="1701364" y="2209169"/>
-              <a:ext cx="0" cy="3364365"/>
+              <a:off x="1264853" y="2185486"/>
+              <a:ext cx="0" cy="3427824"/>
             </a:xfrm>
             <a:custGeom>
               <a:avLst/>
               <a:pathLst>
-                <a:path w="0" h="3364365">
+                <a:path w="0" h="3427824">
                   <a:moveTo>
-                    <a:pt x="0" y="3364365"/>
+                    <a:pt x="0" y="3427824"/>
                   </a:moveTo>
                   <a:lnTo>
                     <a:pt x="0" y="0"/>
@@ -2486,15 +2486,15 @@
           </p:nvSpPr>
           <p:spPr>
             <a:xfrm>
-              <a:off x="3447406" y="2209169"/>
-              <a:ext cx="0" cy="3364365"/>
+              <a:off x="2137874" y="2185486"/>
+              <a:ext cx="0" cy="3427824"/>
             </a:xfrm>
             <a:custGeom>
               <a:avLst/>
               <a:pathLst>
-                <a:path w="0" h="3364365">
+                <a:path w="0" h="3427824">
                   <a:moveTo>
-                    <a:pt x="0" y="3364365"/>
+                    <a:pt x="0" y="3427824"/>
                   </a:moveTo>
                   <a:lnTo>
                     <a:pt x="0" y="0"/>
@@ -2529,15 +2529,15 @@
           </p:nvSpPr>
           <p:spPr>
             <a:xfrm>
-              <a:off x="5193449" y="2209169"/>
-              <a:ext cx="0" cy="3364365"/>
+              <a:off x="3010896" y="2185486"/>
+              <a:ext cx="0" cy="3427824"/>
             </a:xfrm>
             <a:custGeom>
               <a:avLst/>
               <a:pathLst>
-                <a:path w="0" h="3364365">
+                <a:path w="0" h="3427824">
                   <a:moveTo>
-                    <a:pt x="0" y="3364365"/>
+                    <a:pt x="0" y="3427824"/>
                   </a:moveTo>
                   <a:lnTo>
                     <a:pt x="0" y="0"/>
@@ -2572,15 +2572,15 @@
           </p:nvSpPr>
           <p:spPr>
             <a:xfrm>
-              <a:off x="6939491" y="2209169"/>
-              <a:ext cx="0" cy="3364365"/>
+              <a:off x="3883917" y="2185486"/>
+              <a:ext cx="0" cy="3427824"/>
             </a:xfrm>
             <a:custGeom>
               <a:avLst/>
               <a:pathLst>
-                <a:path w="0" h="3364365">
+                <a:path w="0" h="3427824">
                   <a:moveTo>
-                    <a:pt x="0" y="3364365"/>
+                    <a:pt x="0" y="3427824"/>
                   </a:moveTo>
                   <a:lnTo>
                     <a:pt x="0" y="0"/>
@@ -2615,26 +2615,26 @@
           </p:nvSpPr>
           <p:spPr>
             <a:xfrm>
-              <a:off x="915645" y="5420609"/>
-              <a:ext cx="7682587" cy="0"/>
+              <a:off x="4756938" y="2185486"/>
+              <a:ext cx="0" cy="3427824"/>
             </a:xfrm>
             <a:custGeom>
               <a:avLst/>
               <a:pathLst>
-                <a:path w="7682587" h="0">
+                <a:path w="0" h="3427824">
                   <a:moveTo>
+                    <a:pt x="0" y="3427824"/>
+                  </a:moveTo>
+                  <a:lnTo>
                     <a:pt x="0" y="0"/>
-                  </a:moveTo>
-                  <a:lnTo>
-                    <a:pt x="7682587" y="0"/>
-                  </a:lnTo>
-                  <a:lnTo>
-                    <a:pt x="7682587" y="0"/>
+                  </a:lnTo>
+                  <a:lnTo>
+                    <a:pt x="0" y="0"/>
                   </a:lnTo>
                 </a:path>
               </a:pathLst>
             </a:custGeom>
-            <a:ln w="17246" cap="flat">
+            <a:ln w="8623" cap="flat">
               <a:solidFill>
                 <a:srgbClr val="EBEBEB">
                   <a:alpha val="100000"/>
@@ -2658,26 +2658,26 @@
           </p:nvSpPr>
           <p:spPr>
             <a:xfrm>
-              <a:off x="915645" y="4655980"/>
-              <a:ext cx="7682587" cy="0"/>
+              <a:off x="5629959" y="2185486"/>
+              <a:ext cx="0" cy="3427824"/>
             </a:xfrm>
             <a:custGeom>
               <a:avLst/>
               <a:pathLst>
-                <a:path w="7682587" h="0">
+                <a:path w="0" h="3427824">
                   <a:moveTo>
+                    <a:pt x="0" y="3427824"/>
+                  </a:moveTo>
+                  <a:lnTo>
                     <a:pt x="0" y="0"/>
-                  </a:moveTo>
-                  <a:lnTo>
-                    <a:pt x="7682587" y="0"/>
-                  </a:lnTo>
-                  <a:lnTo>
-                    <a:pt x="7682587" y="0"/>
+                  </a:lnTo>
+                  <a:lnTo>
+                    <a:pt x="0" y="0"/>
                   </a:lnTo>
                 </a:path>
               </a:pathLst>
             </a:custGeom>
-            <a:ln w="17246" cap="flat">
+            <a:ln w="8623" cap="flat">
               <a:solidFill>
                 <a:srgbClr val="EBEBEB">
                   <a:alpha val="100000"/>
@@ -2701,26 +2701,26 @@
           </p:nvSpPr>
           <p:spPr>
             <a:xfrm>
-              <a:off x="915645" y="3891352"/>
-              <a:ext cx="7682587" cy="0"/>
+              <a:off x="6502981" y="2185486"/>
+              <a:ext cx="0" cy="3427824"/>
             </a:xfrm>
             <a:custGeom>
               <a:avLst/>
               <a:pathLst>
-                <a:path w="7682587" h="0">
+                <a:path w="0" h="3427824">
                   <a:moveTo>
+                    <a:pt x="0" y="3427824"/>
+                  </a:moveTo>
+                  <a:lnTo>
                     <a:pt x="0" y="0"/>
-                  </a:moveTo>
-                  <a:lnTo>
-                    <a:pt x="7682587" y="0"/>
-                  </a:lnTo>
-                  <a:lnTo>
-                    <a:pt x="7682587" y="0"/>
+                  </a:lnTo>
+                  <a:lnTo>
+                    <a:pt x="0" y="0"/>
                   </a:lnTo>
                 </a:path>
               </a:pathLst>
             </a:custGeom>
-            <a:ln w="17246" cap="flat">
+            <a:ln w="8623" cap="flat">
               <a:solidFill>
                 <a:srgbClr val="EBEBEB">
                   <a:alpha val="100000"/>
@@ -2744,26 +2744,26 @@
           </p:nvSpPr>
           <p:spPr>
             <a:xfrm>
-              <a:off x="915645" y="3126723"/>
-              <a:ext cx="7682587" cy="0"/>
+              <a:off x="7376002" y="2185486"/>
+              <a:ext cx="0" cy="3427824"/>
             </a:xfrm>
             <a:custGeom>
               <a:avLst/>
               <a:pathLst>
-                <a:path w="7682587" h="0">
+                <a:path w="0" h="3427824">
                   <a:moveTo>
+                    <a:pt x="0" y="3427824"/>
+                  </a:moveTo>
+                  <a:lnTo>
                     <a:pt x="0" y="0"/>
-                  </a:moveTo>
-                  <a:lnTo>
-                    <a:pt x="7682587" y="0"/>
-                  </a:lnTo>
-                  <a:lnTo>
-                    <a:pt x="7682587" y="0"/>
+                  </a:lnTo>
+                  <a:lnTo>
+                    <a:pt x="0" y="0"/>
                   </a:lnTo>
                 </a:path>
               </a:pathLst>
             </a:custGeom>
-            <a:ln w="17246" cap="flat">
+            <a:ln w="8623" cap="flat">
               <a:solidFill>
                 <a:srgbClr val="EBEBEB">
                   <a:alpha val="100000"/>
@@ -2787,26 +2787,26 @@
           </p:nvSpPr>
           <p:spPr>
             <a:xfrm>
-              <a:off x="915645" y="2362095"/>
-              <a:ext cx="7682587" cy="0"/>
+              <a:off x="8249023" y="2185486"/>
+              <a:ext cx="0" cy="3427824"/>
             </a:xfrm>
             <a:custGeom>
               <a:avLst/>
               <a:pathLst>
-                <a:path w="7682587" h="0">
+                <a:path w="0" h="3427824">
                   <a:moveTo>
+                    <a:pt x="0" y="3427824"/>
+                  </a:moveTo>
+                  <a:lnTo>
                     <a:pt x="0" y="0"/>
-                  </a:moveTo>
-                  <a:lnTo>
-                    <a:pt x="7682587" y="0"/>
-                  </a:lnTo>
-                  <a:lnTo>
-                    <a:pt x="7682587" y="0"/>
+                  </a:lnTo>
+                  <a:lnTo>
+                    <a:pt x="0" y="0"/>
                   </a:lnTo>
                 </a:path>
               </a:pathLst>
             </a:custGeom>
-            <a:ln w="17246" cap="flat">
+            <a:ln w="8623" cap="flat">
               <a:solidFill>
                 <a:srgbClr val="EBEBEB">
                   <a:alpha val="100000"/>
@@ -2830,21 +2830,21 @@
           </p:nvSpPr>
           <p:spPr>
             <a:xfrm>
-              <a:off x="2574385" y="2209169"/>
-              <a:ext cx="0" cy="3364365"/>
+              <a:off x="915645" y="5457500"/>
+              <a:ext cx="7682587" cy="0"/>
             </a:xfrm>
             <a:custGeom>
               <a:avLst/>
               <a:pathLst>
-                <a:path w="0" h="3364365">
+                <a:path w="7682587" h="0">
                   <a:moveTo>
-                    <a:pt x="0" y="3364365"/>
+                    <a:pt x="0" y="0"/>
                   </a:moveTo>
                   <a:lnTo>
-                    <a:pt x="0" y="0"/>
-                  </a:lnTo>
-                  <a:lnTo>
-                    <a:pt x="0" y="0"/>
+                    <a:pt x="7682587" y="0"/>
+                  </a:lnTo>
+                  <a:lnTo>
+                    <a:pt x="7682587" y="0"/>
                   </a:lnTo>
                 </a:path>
               </a:pathLst>
@@ -2873,21 +2873,21 @@
           </p:nvSpPr>
           <p:spPr>
             <a:xfrm>
-              <a:off x="4320427" y="2209169"/>
-              <a:ext cx="0" cy="3364365"/>
+              <a:off x="915645" y="4678449"/>
+              <a:ext cx="7682587" cy="0"/>
             </a:xfrm>
             <a:custGeom>
               <a:avLst/>
               <a:pathLst>
-                <a:path w="0" h="3364365">
+                <a:path w="7682587" h="0">
                   <a:moveTo>
-                    <a:pt x="0" y="3364365"/>
+                    <a:pt x="0" y="0"/>
                   </a:moveTo>
                   <a:lnTo>
-                    <a:pt x="0" y="0"/>
-                  </a:lnTo>
-                  <a:lnTo>
-                    <a:pt x="0" y="0"/>
+                    <a:pt x="7682587" y="0"/>
+                  </a:lnTo>
+                  <a:lnTo>
+                    <a:pt x="7682587" y="0"/>
                   </a:lnTo>
                 </a:path>
               </a:pathLst>
@@ -2916,21 +2916,21 @@
           </p:nvSpPr>
           <p:spPr>
             <a:xfrm>
-              <a:off x="6066470" y="2209169"/>
-              <a:ext cx="0" cy="3364365"/>
+              <a:off x="915645" y="3899398"/>
+              <a:ext cx="7682587" cy="0"/>
             </a:xfrm>
             <a:custGeom>
               <a:avLst/>
               <a:pathLst>
-                <a:path w="0" h="3364365">
+                <a:path w="7682587" h="0">
                   <a:moveTo>
-                    <a:pt x="0" y="3364365"/>
+                    <a:pt x="0" y="0"/>
                   </a:moveTo>
                   <a:lnTo>
-                    <a:pt x="0" y="0"/>
-                  </a:lnTo>
-                  <a:lnTo>
-                    <a:pt x="0" y="0"/>
+                    <a:pt x="7682587" y="0"/>
+                  </a:lnTo>
+                  <a:lnTo>
+                    <a:pt x="7682587" y="0"/>
                   </a:lnTo>
                 </a:path>
               </a:pathLst>
@@ -2959,21 +2959,21 @@
           </p:nvSpPr>
           <p:spPr>
             <a:xfrm>
-              <a:off x="7812512" y="2209169"/>
-              <a:ext cx="0" cy="3364365"/>
+              <a:off x="915645" y="3120347"/>
+              <a:ext cx="7682587" cy="0"/>
             </a:xfrm>
             <a:custGeom>
               <a:avLst/>
               <a:pathLst>
-                <a:path w="0" h="3364365">
+                <a:path w="7682587" h="0">
                   <a:moveTo>
-                    <a:pt x="0" y="3364365"/>
+                    <a:pt x="0" y="0"/>
                   </a:moveTo>
                   <a:lnTo>
-                    <a:pt x="0" y="0"/>
-                  </a:lnTo>
-                  <a:lnTo>
-                    <a:pt x="0" y="0"/>
+                    <a:pt x="7682587" y="0"/>
+                  </a:lnTo>
+                  <a:lnTo>
+                    <a:pt x="7682587" y="0"/>
                   </a:lnTo>
                 </a:path>
               </a:pathLst>
@@ -2996,522 +2996,909 @@
         </p:sp>
         <p:sp>
           <p:nvSpPr>
-            <p:cNvPr id="21" name="pg21"/>
+            <p:cNvPr id="21" name="pl21"/>
             <p:cNvSpPr/>
             <p:nvPr/>
           </p:nvSpPr>
           <p:spPr>
             <a:xfrm>
-              <a:off x="915645" y="2209169"/>
-              <a:ext cx="7260303" cy="3196600"/>
+              <a:off x="915645" y="2341296"/>
+              <a:ext cx="7682587" cy="0"/>
             </a:xfrm>
             <a:custGeom>
               <a:avLst/>
               <a:pathLst>
-                <a:path w="7260303" h="3196600">
+                <a:path w="7682587" h="0">
+                  <a:moveTo>
+                    <a:pt x="0" y="0"/>
+                  </a:moveTo>
+                  <a:lnTo>
+                    <a:pt x="7682587" y="0"/>
+                  </a:lnTo>
+                  <a:lnTo>
+                    <a:pt x="7682587" y="0"/>
+                  </a:lnTo>
+                </a:path>
+              </a:pathLst>
+            </a:custGeom>
+            <a:ln w="17246" cap="flat">
+              <a:solidFill>
+                <a:srgbClr val="EBEBEB">
+                  <a:alpha val="100000"/>
+                </a:srgbClr>
+              </a:solidFill>
+              <a:prstDash val="solid"/>
+              <a:round/>
+            </a:ln>
+          </p:spPr>
+          <p:txBody>
+            <a:bodyPr/>
+            <a:lstStyle/>
+            <a:p/>
+          </p:txBody>
+        </p:sp>
+        <p:sp>
+          <p:nvSpPr>
+            <p:cNvPr id="22" name="pl22"/>
+            <p:cNvSpPr/>
+            <p:nvPr/>
+          </p:nvSpPr>
+          <p:spPr>
+            <a:xfrm>
+              <a:off x="1701364" y="2185486"/>
+              <a:ext cx="0" cy="3427824"/>
+            </a:xfrm>
+            <a:custGeom>
+              <a:avLst/>
+              <a:pathLst>
+                <a:path w="0" h="3427824">
+                  <a:moveTo>
+                    <a:pt x="0" y="3427824"/>
+                  </a:moveTo>
+                  <a:lnTo>
+                    <a:pt x="0" y="0"/>
+                  </a:lnTo>
+                  <a:lnTo>
+                    <a:pt x="0" y="0"/>
+                  </a:lnTo>
+                </a:path>
+              </a:pathLst>
+            </a:custGeom>
+            <a:ln w="17246" cap="flat">
+              <a:solidFill>
+                <a:srgbClr val="EBEBEB">
+                  <a:alpha val="100000"/>
+                </a:srgbClr>
+              </a:solidFill>
+              <a:prstDash val="solid"/>
+              <a:round/>
+            </a:ln>
+          </p:spPr>
+          <p:txBody>
+            <a:bodyPr/>
+            <a:lstStyle/>
+            <a:p/>
+          </p:txBody>
+        </p:sp>
+        <p:sp>
+          <p:nvSpPr>
+            <p:cNvPr id="23" name="pl23"/>
+            <p:cNvSpPr/>
+            <p:nvPr/>
+          </p:nvSpPr>
+          <p:spPr>
+            <a:xfrm>
+              <a:off x="2574385" y="2185486"/>
+              <a:ext cx="0" cy="3427824"/>
+            </a:xfrm>
+            <a:custGeom>
+              <a:avLst/>
+              <a:pathLst>
+                <a:path w="0" h="3427824">
+                  <a:moveTo>
+                    <a:pt x="0" y="3427824"/>
+                  </a:moveTo>
+                  <a:lnTo>
+                    <a:pt x="0" y="0"/>
+                  </a:lnTo>
+                  <a:lnTo>
+                    <a:pt x="0" y="0"/>
+                  </a:lnTo>
+                </a:path>
+              </a:pathLst>
+            </a:custGeom>
+            <a:ln w="17246" cap="flat">
+              <a:solidFill>
+                <a:srgbClr val="EBEBEB">
+                  <a:alpha val="100000"/>
+                </a:srgbClr>
+              </a:solidFill>
+              <a:prstDash val="solid"/>
+              <a:round/>
+            </a:ln>
+          </p:spPr>
+          <p:txBody>
+            <a:bodyPr/>
+            <a:lstStyle/>
+            <a:p/>
+          </p:txBody>
+        </p:sp>
+        <p:sp>
+          <p:nvSpPr>
+            <p:cNvPr id="24" name="pl24"/>
+            <p:cNvSpPr/>
+            <p:nvPr/>
+          </p:nvSpPr>
+          <p:spPr>
+            <a:xfrm>
+              <a:off x="3447406" y="2185486"/>
+              <a:ext cx="0" cy="3427824"/>
+            </a:xfrm>
+            <a:custGeom>
+              <a:avLst/>
+              <a:pathLst>
+                <a:path w="0" h="3427824">
+                  <a:moveTo>
+                    <a:pt x="0" y="3427824"/>
+                  </a:moveTo>
+                  <a:lnTo>
+                    <a:pt x="0" y="0"/>
+                  </a:lnTo>
+                  <a:lnTo>
+                    <a:pt x="0" y="0"/>
+                  </a:lnTo>
+                </a:path>
+              </a:pathLst>
+            </a:custGeom>
+            <a:ln w="17246" cap="flat">
+              <a:solidFill>
+                <a:srgbClr val="EBEBEB">
+                  <a:alpha val="100000"/>
+                </a:srgbClr>
+              </a:solidFill>
+              <a:prstDash val="solid"/>
+              <a:round/>
+            </a:ln>
+          </p:spPr>
+          <p:txBody>
+            <a:bodyPr/>
+            <a:lstStyle/>
+            <a:p/>
+          </p:txBody>
+        </p:sp>
+        <p:sp>
+          <p:nvSpPr>
+            <p:cNvPr id="25" name="pl25"/>
+            <p:cNvSpPr/>
+            <p:nvPr/>
+          </p:nvSpPr>
+          <p:spPr>
+            <a:xfrm>
+              <a:off x="4320427" y="2185486"/>
+              <a:ext cx="0" cy="3427824"/>
+            </a:xfrm>
+            <a:custGeom>
+              <a:avLst/>
+              <a:pathLst>
+                <a:path w="0" h="3427824">
+                  <a:moveTo>
+                    <a:pt x="0" y="3427824"/>
+                  </a:moveTo>
+                  <a:lnTo>
+                    <a:pt x="0" y="0"/>
+                  </a:lnTo>
+                  <a:lnTo>
+                    <a:pt x="0" y="0"/>
+                  </a:lnTo>
+                </a:path>
+              </a:pathLst>
+            </a:custGeom>
+            <a:ln w="17246" cap="flat">
+              <a:solidFill>
+                <a:srgbClr val="EBEBEB">
+                  <a:alpha val="100000"/>
+                </a:srgbClr>
+              </a:solidFill>
+              <a:prstDash val="solid"/>
+              <a:round/>
+            </a:ln>
+          </p:spPr>
+          <p:txBody>
+            <a:bodyPr/>
+            <a:lstStyle/>
+            <a:p/>
+          </p:txBody>
+        </p:sp>
+        <p:sp>
+          <p:nvSpPr>
+            <p:cNvPr id="26" name="pl26"/>
+            <p:cNvSpPr/>
+            <p:nvPr/>
+          </p:nvSpPr>
+          <p:spPr>
+            <a:xfrm>
+              <a:off x="5193449" y="2185486"/>
+              <a:ext cx="0" cy="3427824"/>
+            </a:xfrm>
+            <a:custGeom>
+              <a:avLst/>
+              <a:pathLst>
+                <a:path w="0" h="3427824">
+                  <a:moveTo>
+                    <a:pt x="0" y="3427824"/>
+                  </a:moveTo>
+                  <a:lnTo>
+                    <a:pt x="0" y="0"/>
+                  </a:lnTo>
+                  <a:lnTo>
+                    <a:pt x="0" y="0"/>
+                  </a:lnTo>
+                </a:path>
+              </a:pathLst>
+            </a:custGeom>
+            <a:ln w="17246" cap="flat">
+              <a:solidFill>
+                <a:srgbClr val="EBEBEB">
+                  <a:alpha val="100000"/>
+                </a:srgbClr>
+              </a:solidFill>
+              <a:prstDash val="solid"/>
+              <a:round/>
+            </a:ln>
+          </p:spPr>
+          <p:txBody>
+            <a:bodyPr/>
+            <a:lstStyle/>
+            <a:p/>
+          </p:txBody>
+        </p:sp>
+        <p:sp>
+          <p:nvSpPr>
+            <p:cNvPr id="27" name="pl27"/>
+            <p:cNvSpPr/>
+            <p:nvPr/>
+          </p:nvSpPr>
+          <p:spPr>
+            <a:xfrm>
+              <a:off x="6066470" y="2185486"/>
+              <a:ext cx="0" cy="3427824"/>
+            </a:xfrm>
+            <a:custGeom>
+              <a:avLst/>
+              <a:pathLst>
+                <a:path w="0" h="3427824">
+                  <a:moveTo>
+                    <a:pt x="0" y="3427824"/>
+                  </a:moveTo>
+                  <a:lnTo>
+                    <a:pt x="0" y="0"/>
+                  </a:lnTo>
+                  <a:lnTo>
+                    <a:pt x="0" y="0"/>
+                  </a:lnTo>
+                </a:path>
+              </a:pathLst>
+            </a:custGeom>
+            <a:ln w="17246" cap="flat">
+              <a:solidFill>
+                <a:srgbClr val="EBEBEB">
+                  <a:alpha val="100000"/>
+                </a:srgbClr>
+              </a:solidFill>
+              <a:prstDash val="solid"/>
+              <a:round/>
+            </a:ln>
+          </p:spPr>
+          <p:txBody>
+            <a:bodyPr/>
+            <a:lstStyle/>
+            <a:p/>
+          </p:txBody>
+        </p:sp>
+        <p:sp>
+          <p:nvSpPr>
+            <p:cNvPr id="28" name="pl28"/>
+            <p:cNvSpPr/>
+            <p:nvPr/>
+          </p:nvSpPr>
+          <p:spPr>
+            <a:xfrm>
+              <a:off x="6939491" y="2185486"/>
+              <a:ext cx="0" cy="3427824"/>
+            </a:xfrm>
+            <a:custGeom>
+              <a:avLst/>
+              <a:pathLst>
+                <a:path w="0" h="3427824">
+                  <a:moveTo>
+                    <a:pt x="0" y="3427824"/>
+                  </a:moveTo>
+                  <a:lnTo>
+                    <a:pt x="0" y="0"/>
+                  </a:lnTo>
+                  <a:lnTo>
+                    <a:pt x="0" y="0"/>
+                  </a:lnTo>
+                </a:path>
+              </a:pathLst>
+            </a:custGeom>
+            <a:ln w="17246" cap="flat">
+              <a:solidFill>
+                <a:srgbClr val="EBEBEB">
+                  <a:alpha val="100000"/>
+                </a:srgbClr>
+              </a:solidFill>
+              <a:prstDash val="solid"/>
+              <a:round/>
+            </a:ln>
+          </p:spPr>
+          <p:txBody>
+            <a:bodyPr/>
+            <a:lstStyle/>
+            <a:p/>
+          </p:txBody>
+        </p:sp>
+        <p:sp>
+          <p:nvSpPr>
+            <p:cNvPr id="29" name="pl29"/>
+            <p:cNvSpPr/>
+            <p:nvPr/>
+          </p:nvSpPr>
+          <p:spPr>
+            <a:xfrm>
+              <a:off x="7812512" y="2185486"/>
+              <a:ext cx="0" cy="3427824"/>
+            </a:xfrm>
+            <a:custGeom>
+              <a:avLst/>
+              <a:pathLst>
+                <a:path w="0" h="3427824">
+                  <a:moveTo>
+                    <a:pt x="0" y="3427824"/>
+                  </a:moveTo>
+                  <a:lnTo>
+                    <a:pt x="0" y="0"/>
+                  </a:lnTo>
+                  <a:lnTo>
+                    <a:pt x="0" y="0"/>
+                  </a:lnTo>
+                </a:path>
+              </a:pathLst>
+            </a:custGeom>
+            <a:ln w="17246" cap="flat">
+              <a:solidFill>
+                <a:srgbClr val="EBEBEB">
+                  <a:alpha val="100000"/>
+                </a:srgbClr>
+              </a:solidFill>
+              <a:prstDash val="solid"/>
+              <a:round/>
+            </a:ln>
+          </p:spPr>
+          <p:txBody>
+            <a:bodyPr/>
+            <a:lstStyle/>
+            <a:p/>
+          </p:txBody>
+        </p:sp>
+        <p:sp>
+          <p:nvSpPr>
+            <p:cNvPr id="30" name="pg30"/>
+            <p:cNvSpPr/>
+            <p:nvPr/>
+          </p:nvSpPr>
+          <p:spPr>
+            <a:xfrm>
+              <a:off x="915645" y="2185486"/>
+              <a:ext cx="7260303" cy="3256895"/>
+            </a:xfrm>
+            <a:custGeom>
+              <a:avLst/>
+              <a:pathLst>
+                <a:path w="7260303" h="3256895">
                   <a:moveTo>
                     <a:pt x="1906497" y="0"/>
                   </a:moveTo>
                   <a:lnTo>
-                    <a:pt x="1907513" y="3400"/>
-                  </a:lnTo>
-                  <a:lnTo>
-                    <a:pt x="1983981" y="240559"/>
-                  </a:lnTo>
-                  <a:lnTo>
-                    <a:pt x="2060450" y="460186"/>
-                  </a:lnTo>
-                  <a:lnTo>
-                    <a:pt x="2136918" y="663577"/>
-                  </a:lnTo>
-                  <a:lnTo>
-                    <a:pt x="2213386" y="851931"/>
-                  </a:lnTo>
-                  <a:lnTo>
-                    <a:pt x="2289855" y="1026362"/>
-                  </a:lnTo>
-                  <a:lnTo>
-                    <a:pt x="2366323" y="1187897"/>
-                  </a:lnTo>
-                  <a:lnTo>
-                    <a:pt x="2442792" y="1337490"/>
-                  </a:lnTo>
-                  <a:lnTo>
-                    <a:pt x="2519260" y="1476025"/>
-                  </a:lnTo>
-                  <a:lnTo>
-                    <a:pt x="2595729" y="1604318"/>
-                  </a:lnTo>
-                  <a:lnTo>
-                    <a:pt x="2672197" y="1723127"/>
-                  </a:lnTo>
-                  <a:lnTo>
-                    <a:pt x="2748666" y="1833153"/>
-                  </a:lnTo>
-                  <a:lnTo>
-                    <a:pt x="2825134" y="1935045"/>
-                  </a:lnTo>
-                  <a:lnTo>
-                    <a:pt x="2901602" y="2029404"/>
-                  </a:lnTo>
-                  <a:lnTo>
-                    <a:pt x="2978071" y="2116788"/>
-                  </a:lnTo>
-                  <a:lnTo>
-                    <a:pt x="3054539" y="2197712"/>
-                  </a:lnTo>
-                  <a:lnTo>
-                    <a:pt x="3131008" y="2272653"/>
-                  </a:lnTo>
-                  <a:lnTo>
-                    <a:pt x="3207476" y="2342055"/>
-                  </a:lnTo>
-                  <a:lnTo>
-                    <a:pt x="3283945" y="2406325"/>
-                  </a:lnTo>
-                  <a:lnTo>
-                    <a:pt x="3360413" y="2444759"/>
-                  </a:lnTo>
-                  <a:lnTo>
-                    <a:pt x="3436881" y="2438474"/>
-                  </a:lnTo>
-                  <a:lnTo>
-                    <a:pt x="3513350" y="2432137"/>
-                  </a:lnTo>
-                  <a:lnTo>
-                    <a:pt x="3589818" y="2425748"/>
-                  </a:lnTo>
-                  <a:lnTo>
-                    <a:pt x="3666287" y="2419307"/>
-                  </a:lnTo>
-                  <a:lnTo>
-                    <a:pt x="3742755" y="2412813"/>
-                  </a:lnTo>
-                  <a:lnTo>
-                    <a:pt x="3819224" y="2406266"/>
-                  </a:lnTo>
-                  <a:lnTo>
-                    <a:pt x="3895692" y="2399665"/>
-                  </a:lnTo>
-                  <a:lnTo>
-                    <a:pt x="3972160" y="2393010"/>
-                  </a:lnTo>
-                  <a:lnTo>
-                    <a:pt x="4048629" y="2386300"/>
-                  </a:lnTo>
-                  <a:lnTo>
-                    <a:pt x="4125097" y="2379536"/>
-                  </a:lnTo>
-                  <a:lnTo>
-                    <a:pt x="4201566" y="2372716"/>
-                  </a:lnTo>
-                  <a:lnTo>
-                    <a:pt x="4278034" y="2365840"/>
-                  </a:lnTo>
-                  <a:lnTo>
-                    <a:pt x="4354503" y="2358908"/>
-                  </a:lnTo>
-                  <a:lnTo>
-                    <a:pt x="4430971" y="2351919"/>
-                  </a:lnTo>
-                  <a:lnTo>
-                    <a:pt x="4507439" y="2344872"/>
-                  </a:lnTo>
-                  <a:lnTo>
-                    <a:pt x="4583908" y="2337768"/>
-                  </a:lnTo>
-                  <a:lnTo>
-                    <a:pt x="4660376" y="2330606"/>
-                  </a:lnTo>
-                  <a:lnTo>
-                    <a:pt x="4736845" y="2323384"/>
-                  </a:lnTo>
-                  <a:lnTo>
-                    <a:pt x="4813313" y="2316104"/>
-                  </a:lnTo>
-                  <a:lnTo>
-                    <a:pt x="4889782" y="2308764"/>
-                  </a:lnTo>
-                  <a:lnTo>
-                    <a:pt x="4966250" y="2301364"/>
-                  </a:lnTo>
-                  <a:lnTo>
-                    <a:pt x="5042719" y="2293903"/>
-                  </a:lnTo>
-                  <a:lnTo>
-                    <a:pt x="5119187" y="2286381"/>
-                  </a:lnTo>
-                  <a:lnTo>
-                    <a:pt x="5195655" y="2278797"/>
-                  </a:lnTo>
-                  <a:lnTo>
-                    <a:pt x="5272124" y="2271152"/>
-                  </a:lnTo>
-                  <a:lnTo>
-                    <a:pt x="5348592" y="2263443"/>
-                  </a:lnTo>
-                  <a:lnTo>
-                    <a:pt x="5425061" y="2255671"/>
-                  </a:lnTo>
-                  <a:lnTo>
-                    <a:pt x="5501529" y="2247836"/>
-                  </a:lnTo>
-                  <a:lnTo>
-                    <a:pt x="5577998" y="2239936"/>
-                  </a:lnTo>
-                  <a:lnTo>
-                    <a:pt x="5654466" y="2231972"/>
-                  </a:lnTo>
-                  <a:lnTo>
-                    <a:pt x="5730934" y="2223942"/>
-                  </a:lnTo>
-                  <a:lnTo>
-                    <a:pt x="5807403" y="2215846"/>
-                  </a:lnTo>
-                  <a:lnTo>
-                    <a:pt x="5883871" y="2207684"/>
-                  </a:lnTo>
-                  <a:lnTo>
-                    <a:pt x="5960340" y="2199456"/>
-                  </a:lnTo>
-                  <a:lnTo>
-                    <a:pt x="6036808" y="2191159"/>
-                  </a:lnTo>
-                  <a:lnTo>
-                    <a:pt x="6113277" y="2182795"/>
-                  </a:lnTo>
-                  <a:lnTo>
-                    <a:pt x="6189745" y="2174362"/>
-                  </a:lnTo>
-                  <a:lnTo>
-                    <a:pt x="6266213" y="2165860"/>
-                  </a:lnTo>
-                  <a:lnTo>
-                    <a:pt x="6342682" y="2157288"/>
-                  </a:lnTo>
-                  <a:lnTo>
-                    <a:pt x="6419150" y="2148646"/>
-                  </a:lnTo>
-                  <a:lnTo>
-                    <a:pt x="6495619" y="2139934"/>
-                  </a:lnTo>
-                  <a:lnTo>
-                    <a:pt x="6572087" y="2131149"/>
-                  </a:lnTo>
-                  <a:lnTo>
-                    <a:pt x="6648556" y="2122293"/>
-                  </a:lnTo>
-                  <a:lnTo>
-                    <a:pt x="6725024" y="2113364"/>
-                  </a:lnTo>
-                  <a:lnTo>
-                    <a:pt x="6801492" y="2104362"/>
-                  </a:lnTo>
-                  <a:lnTo>
-                    <a:pt x="6877961" y="2095286"/>
-                  </a:lnTo>
-                  <a:lnTo>
-                    <a:pt x="6954429" y="2086136"/>
-                  </a:lnTo>
-                  <a:lnTo>
-                    <a:pt x="7030898" y="2076911"/>
-                  </a:lnTo>
-                  <a:lnTo>
-                    <a:pt x="7107366" y="2067610"/>
-                  </a:lnTo>
-                  <a:lnTo>
-                    <a:pt x="7183835" y="2058232"/>
-                  </a:lnTo>
-                  <a:lnTo>
-                    <a:pt x="7260303" y="2048778"/>
-                  </a:lnTo>
-                  <a:lnTo>
-                    <a:pt x="7260303" y="3196600"/>
-                  </a:lnTo>
-                  <a:lnTo>
-                    <a:pt x="7183835" y="3195415"/>
-                  </a:lnTo>
-                  <a:lnTo>
-                    <a:pt x="7107366" y="3194136"/>
-                  </a:lnTo>
-                  <a:lnTo>
-                    <a:pt x="7030898" y="3192755"/>
-                  </a:lnTo>
-                  <a:lnTo>
-                    <a:pt x="6954429" y="3191263"/>
-                  </a:lnTo>
-                  <a:lnTo>
-                    <a:pt x="6877961" y="3189652"/>
-                  </a:lnTo>
-                  <a:lnTo>
-                    <a:pt x="6801492" y="3187913"/>
-                  </a:lnTo>
-                  <a:lnTo>
-                    <a:pt x="6725024" y="3186035"/>
-                  </a:lnTo>
-                  <a:lnTo>
-                    <a:pt x="6648556" y="3184007"/>
-                  </a:lnTo>
-                  <a:lnTo>
-                    <a:pt x="6572087" y="3181817"/>
-                  </a:lnTo>
-                  <a:lnTo>
-                    <a:pt x="6495619" y="3179453"/>
-                  </a:lnTo>
-                  <a:lnTo>
-                    <a:pt x="6419150" y="3176899"/>
-                  </a:lnTo>
-                  <a:lnTo>
-                    <a:pt x="6342682" y="3174142"/>
-                  </a:lnTo>
-                  <a:lnTo>
-                    <a:pt x="6266213" y="3171165"/>
-                  </a:lnTo>
-                  <a:lnTo>
-                    <a:pt x="6189745" y="3167950"/>
-                  </a:lnTo>
-                  <a:lnTo>
-                    <a:pt x="6113277" y="3164478"/>
-                  </a:lnTo>
-                  <a:lnTo>
-                    <a:pt x="6036808" y="3160729"/>
-                  </a:lnTo>
-                  <a:lnTo>
-                    <a:pt x="5960340" y="3156681"/>
-                  </a:lnTo>
-                  <a:lnTo>
-                    <a:pt x="5883871" y="3152310"/>
-                  </a:lnTo>
-                  <a:lnTo>
-                    <a:pt x="5807403" y="3147590"/>
-                  </a:lnTo>
-                  <a:lnTo>
-                    <a:pt x="5730934" y="3142493"/>
-                  </a:lnTo>
-                  <a:lnTo>
-                    <a:pt x="5654466" y="3136989"/>
-                  </a:lnTo>
-                  <a:lnTo>
-                    <a:pt x="5577998" y="3131046"/>
-                  </a:lnTo>
-                  <a:lnTo>
-                    <a:pt x="5501529" y="3124628"/>
-                  </a:lnTo>
-                  <a:lnTo>
-                    <a:pt x="5425061" y="3117698"/>
-                  </a:lnTo>
-                  <a:lnTo>
-                    <a:pt x="5348592" y="3110215"/>
-                  </a:lnTo>
-                  <a:lnTo>
-                    <a:pt x="5272124" y="3102135"/>
-                  </a:lnTo>
-                  <a:lnTo>
-                    <a:pt x="5195655" y="3093409"/>
-                  </a:lnTo>
-                  <a:lnTo>
-                    <a:pt x="5119187" y="3083987"/>
-                  </a:lnTo>
-                  <a:lnTo>
-                    <a:pt x="5042719" y="3073813"/>
-                  </a:lnTo>
-                  <a:lnTo>
-                    <a:pt x="4966250" y="3062826"/>
-                  </a:lnTo>
-                  <a:lnTo>
-                    <a:pt x="4889782" y="3050963"/>
-                  </a:lnTo>
-                  <a:lnTo>
-                    <a:pt x="4813313" y="3038152"/>
-                  </a:lnTo>
-                  <a:lnTo>
-                    <a:pt x="4736845" y="3024319"/>
-                  </a:lnTo>
-                  <a:lnTo>
-                    <a:pt x="4660376" y="3009382"/>
-                  </a:lnTo>
-                  <a:lnTo>
-                    <a:pt x="4583908" y="2993252"/>
-                  </a:lnTo>
-                  <a:lnTo>
-                    <a:pt x="4507439" y="2975834"/>
-                  </a:lnTo>
-                  <a:lnTo>
-                    <a:pt x="4430971" y="2957026"/>
-                  </a:lnTo>
-                  <a:lnTo>
-                    <a:pt x="4354503" y="2936717"/>
-                  </a:lnTo>
-                  <a:lnTo>
-                    <a:pt x="4278034" y="2914787"/>
-                  </a:lnTo>
-                  <a:lnTo>
-                    <a:pt x="4201566" y="2891106"/>
-                  </a:lnTo>
-                  <a:lnTo>
-                    <a:pt x="4125097" y="2865534"/>
-                  </a:lnTo>
-                  <a:lnTo>
-                    <a:pt x="4048629" y="2837921"/>
-                  </a:lnTo>
-                  <a:lnTo>
-                    <a:pt x="3972160" y="2808104"/>
-                  </a:lnTo>
-                  <a:lnTo>
-                    <a:pt x="3895692" y="2775906"/>
-                  </a:lnTo>
-                  <a:lnTo>
-                    <a:pt x="3819224" y="2741139"/>
-                  </a:lnTo>
-                  <a:lnTo>
-                    <a:pt x="3742755" y="2703596"/>
-                  </a:lnTo>
-                  <a:lnTo>
-                    <a:pt x="3666287" y="2663056"/>
-                  </a:lnTo>
-                  <a:lnTo>
-                    <a:pt x="3589818" y="2619279"/>
-                  </a:lnTo>
-                  <a:lnTo>
-                    <a:pt x="3513350" y="2572008"/>
-                  </a:lnTo>
-                  <a:lnTo>
-                    <a:pt x="3436881" y="2520964"/>
-                  </a:lnTo>
-                  <a:lnTo>
-                    <a:pt x="3360413" y="2465844"/>
-                  </a:lnTo>
-                  <a:lnTo>
-                    <a:pt x="3283945" y="2450993"/>
-                  </a:lnTo>
-                  <a:lnTo>
-                    <a:pt x="3207476" y="2457177"/>
-                  </a:lnTo>
-                  <a:lnTo>
-                    <a:pt x="3131008" y="2463310"/>
-                  </a:lnTo>
-                  <a:lnTo>
-                    <a:pt x="3054539" y="2469393"/>
-                  </a:lnTo>
-                  <a:lnTo>
-                    <a:pt x="2978071" y="2475427"/>
-                  </a:lnTo>
-                  <a:lnTo>
-                    <a:pt x="2901602" y="2481412"/>
-                  </a:lnTo>
-                  <a:lnTo>
-                    <a:pt x="2825134" y="2487348"/>
-                  </a:lnTo>
-                  <a:lnTo>
-                    <a:pt x="2748666" y="2493236"/>
-                  </a:lnTo>
-                  <a:lnTo>
-                    <a:pt x="2672197" y="2499076"/>
-                  </a:lnTo>
-                  <a:lnTo>
-                    <a:pt x="2595729" y="2504868"/>
-                  </a:lnTo>
-                  <a:lnTo>
-                    <a:pt x="2519260" y="2510614"/>
-                  </a:lnTo>
-                  <a:lnTo>
-                    <a:pt x="2442792" y="2516312"/>
-                  </a:lnTo>
-                  <a:lnTo>
-                    <a:pt x="2366323" y="2521965"/>
-                  </a:lnTo>
-                  <a:lnTo>
-                    <a:pt x="2289855" y="2527571"/>
-                  </a:lnTo>
-                  <a:lnTo>
-                    <a:pt x="2213386" y="2533132"/>
-                  </a:lnTo>
-                  <a:lnTo>
-                    <a:pt x="2136918" y="2538648"/>
-                  </a:lnTo>
-                  <a:lnTo>
-                    <a:pt x="2060450" y="2544118"/>
-                  </a:lnTo>
-                  <a:lnTo>
-                    <a:pt x="1983981" y="2549545"/>
-                  </a:lnTo>
-                  <a:lnTo>
-                    <a:pt x="1907513" y="2554927"/>
-                  </a:lnTo>
-                  <a:lnTo>
-                    <a:pt x="1831044" y="2560265"/>
-                  </a:lnTo>
-                  <a:lnTo>
-                    <a:pt x="1754576" y="2565560"/>
-                  </a:lnTo>
-                  <a:lnTo>
-                    <a:pt x="1678107" y="2570812"/>
-                  </a:lnTo>
-                  <a:lnTo>
-                    <a:pt x="1601639" y="2576021"/>
-                  </a:lnTo>
-                  <a:lnTo>
-                    <a:pt x="1525171" y="2581188"/>
-                  </a:lnTo>
-                  <a:lnTo>
-                    <a:pt x="1448702" y="2586313"/>
-                  </a:lnTo>
-                  <a:lnTo>
-                    <a:pt x="1372234" y="2591396"/>
-                  </a:lnTo>
-                  <a:lnTo>
-                    <a:pt x="1295765" y="2596438"/>
-                  </a:lnTo>
-                  <a:lnTo>
-                    <a:pt x="1219297" y="2601439"/>
-                  </a:lnTo>
-                  <a:lnTo>
-                    <a:pt x="1142828" y="2606399"/>
-                  </a:lnTo>
-                  <a:lnTo>
-                    <a:pt x="1066360" y="2611319"/>
-                  </a:lnTo>
-                  <a:lnTo>
-                    <a:pt x="989892" y="2616198"/>
-                  </a:lnTo>
-                  <a:lnTo>
-                    <a:pt x="913423" y="2621038"/>
-                  </a:lnTo>
-                  <a:lnTo>
-                    <a:pt x="836955" y="2625839"/>
-                  </a:lnTo>
-                  <a:lnTo>
-                    <a:pt x="760486" y="2630601"/>
-                  </a:lnTo>
-                  <a:lnTo>
-                    <a:pt x="684018" y="2635324"/>
-                  </a:lnTo>
-                  <a:lnTo>
-                    <a:pt x="607549" y="2640009"/>
-                  </a:lnTo>
-                  <a:lnTo>
-                    <a:pt x="531081" y="2644655"/>
-                  </a:lnTo>
-                  <a:lnTo>
-                    <a:pt x="454613" y="2649264"/>
-                  </a:lnTo>
-                  <a:lnTo>
-                    <a:pt x="378144" y="2653835"/>
-                  </a:lnTo>
-                  <a:lnTo>
-                    <a:pt x="301676" y="2658369"/>
-                  </a:lnTo>
-                  <a:lnTo>
-                    <a:pt x="225207" y="2662867"/>
-                  </a:lnTo>
-                  <a:lnTo>
-                    <a:pt x="148739" y="2667327"/>
-                  </a:lnTo>
-                  <a:lnTo>
-                    <a:pt x="72270" y="2671752"/>
-                  </a:lnTo>
-                  <a:lnTo>
-                    <a:pt x="0" y="2675899"/>
+                    <a:pt x="1907513" y="3464"/>
+                  </a:lnTo>
+                  <a:lnTo>
+                    <a:pt x="1983981" y="245096"/>
+                  </a:lnTo>
+                  <a:lnTo>
+                    <a:pt x="2060450" y="468866"/>
+                  </a:lnTo>
+                  <a:lnTo>
+                    <a:pt x="2136918" y="676093"/>
+                  </a:lnTo>
+                  <a:lnTo>
+                    <a:pt x="2213386" y="868001"/>
+                  </a:lnTo>
+                  <a:lnTo>
+                    <a:pt x="2289855" y="1045721"/>
+                  </a:lnTo>
+                  <a:lnTo>
+                    <a:pt x="2366323" y="1210303"/>
+                  </a:lnTo>
+                  <a:lnTo>
+                    <a:pt x="2442792" y="1362719"/>
+                  </a:lnTo>
+                  <a:lnTo>
+                    <a:pt x="2519260" y="1503866"/>
+                  </a:lnTo>
+                  <a:lnTo>
+                    <a:pt x="2595729" y="1634579"/>
+                  </a:lnTo>
+                  <a:lnTo>
+                    <a:pt x="2672197" y="1755629"/>
+                  </a:lnTo>
+                  <a:lnTo>
+                    <a:pt x="2748666" y="1867730"/>
+                  </a:lnTo>
+                  <a:lnTo>
+                    <a:pt x="2825134" y="1971544"/>
+                  </a:lnTo>
+                  <a:lnTo>
+                    <a:pt x="2901602" y="2067683"/>
+                  </a:lnTo>
+                  <a:lnTo>
+                    <a:pt x="2978071" y="2156715"/>
+                  </a:lnTo>
+                  <a:lnTo>
+                    <a:pt x="3054539" y="2239166"/>
+                  </a:lnTo>
+                  <a:lnTo>
+                    <a:pt x="3131008" y="2315521"/>
+                  </a:lnTo>
+                  <a:lnTo>
+                    <a:pt x="3207476" y="2386231"/>
+                  </a:lnTo>
+                  <a:lnTo>
+                    <a:pt x="3283945" y="2451714"/>
+                  </a:lnTo>
+                  <a:lnTo>
+                    <a:pt x="3360413" y="2490872"/>
+                  </a:lnTo>
+                  <a:lnTo>
+                    <a:pt x="3436881" y="2484469"/>
+                  </a:lnTo>
+                  <a:lnTo>
+                    <a:pt x="3513350" y="2478012"/>
+                  </a:lnTo>
+                  <a:lnTo>
+                    <a:pt x="3589818" y="2471503"/>
+                  </a:lnTo>
+                  <a:lnTo>
+                    <a:pt x="3666287" y="2464940"/>
+                  </a:lnTo>
+                  <a:lnTo>
+                    <a:pt x="3742755" y="2458324"/>
+                  </a:lnTo>
+                  <a:lnTo>
+                    <a:pt x="3819224" y="2451653"/>
+                  </a:lnTo>
+                  <a:lnTo>
+                    <a:pt x="3895692" y="2444928"/>
+                  </a:lnTo>
+                  <a:lnTo>
+                    <a:pt x="3972160" y="2438147"/>
+                  </a:lnTo>
+                  <a:lnTo>
+                    <a:pt x="4048629" y="2431311"/>
+                  </a:lnTo>
+                  <a:lnTo>
+                    <a:pt x="4125097" y="2424419"/>
+                  </a:lnTo>
+                  <a:lnTo>
+                    <a:pt x="4201566" y="2417471"/>
+                  </a:lnTo>
+                  <a:lnTo>
+                    <a:pt x="4278034" y="2410465"/>
+                  </a:lnTo>
+                  <a:lnTo>
+                    <a:pt x="4354503" y="2403402"/>
+                  </a:lnTo>
+                  <a:lnTo>
+                    <a:pt x="4430971" y="2396281"/>
+                  </a:lnTo>
+                  <a:lnTo>
+                    <a:pt x="4507439" y="2389102"/>
+                  </a:lnTo>
+                  <a:lnTo>
+                    <a:pt x="4583908" y="2381863"/>
+                  </a:lnTo>
+                  <a:lnTo>
+                    <a:pt x="4660376" y="2374566"/>
+                  </a:lnTo>
+                  <a:lnTo>
+                    <a:pt x="4736845" y="2367209"/>
+                  </a:lnTo>
+                  <a:lnTo>
+                    <a:pt x="4813313" y="2359791"/>
+                  </a:lnTo>
+                  <a:lnTo>
+                    <a:pt x="4889782" y="2352313"/>
+                  </a:lnTo>
+                  <a:lnTo>
+                    <a:pt x="4966250" y="2344773"/>
+                  </a:lnTo>
+                  <a:lnTo>
+                    <a:pt x="5042719" y="2337171"/>
+                  </a:lnTo>
+                  <a:lnTo>
+                    <a:pt x="5119187" y="2329507"/>
+                  </a:lnTo>
+                  <a:lnTo>
+                    <a:pt x="5195655" y="2321781"/>
+                  </a:lnTo>
+                  <a:lnTo>
+                    <a:pt x="5272124" y="2313990"/>
+                  </a:lnTo>
+                  <a:lnTo>
+                    <a:pt x="5348592" y="2306137"/>
+                  </a:lnTo>
+                  <a:lnTo>
+                    <a:pt x="5425061" y="2298218"/>
+                  </a:lnTo>
+                  <a:lnTo>
+                    <a:pt x="5501529" y="2290235"/>
+                  </a:lnTo>
+                  <a:lnTo>
+                    <a:pt x="5577998" y="2282186"/>
+                  </a:lnTo>
+                  <a:lnTo>
+                    <a:pt x="5654466" y="2274072"/>
+                  </a:lnTo>
+                  <a:lnTo>
+                    <a:pt x="5730934" y="2265890"/>
+                  </a:lnTo>
+                  <a:lnTo>
+                    <a:pt x="5807403" y="2257642"/>
+                  </a:lnTo>
+                  <a:lnTo>
+                    <a:pt x="5883871" y="2249326"/>
+                  </a:lnTo>
+                  <a:lnTo>
+                    <a:pt x="5960340" y="2240942"/>
+                  </a:lnTo>
+                  <a:lnTo>
+                    <a:pt x="6036808" y="2232489"/>
+                  </a:lnTo>
+                  <a:lnTo>
+                    <a:pt x="6113277" y="2223967"/>
+                  </a:lnTo>
+                  <a:lnTo>
+                    <a:pt x="6189745" y="2215375"/>
+                  </a:lnTo>
+                  <a:lnTo>
+                    <a:pt x="6266213" y="2206713"/>
+                  </a:lnTo>
+                  <a:lnTo>
+                    <a:pt x="6342682" y="2197980"/>
+                  </a:lnTo>
+                  <a:lnTo>
+                    <a:pt x="6419150" y="2189175"/>
+                  </a:lnTo>
+                  <a:lnTo>
+                    <a:pt x="6495619" y="2180297"/>
+                  </a:lnTo>
+                  <a:lnTo>
+                    <a:pt x="6572087" y="2171347"/>
+                  </a:lnTo>
+                  <a:lnTo>
+                    <a:pt x="6648556" y="2162324"/>
+                  </a:lnTo>
+                  <a:lnTo>
+                    <a:pt x="6725024" y="2153227"/>
+                  </a:lnTo>
+                  <a:lnTo>
+                    <a:pt x="6801492" y="2144055"/>
+                  </a:lnTo>
+                  <a:lnTo>
+                    <a:pt x="6877961" y="2134808"/>
+                  </a:lnTo>
+                  <a:lnTo>
+                    <a:pt x="6954429" y="2125485"/>
+                  </a:lnTo>
+                  <a:lnTo>
+                    <a:pt x="7030898" y="2116086"/>
+                  </a:lnTo>
+                  <a:lnTo>
+                    <a:pt x="7107366" y="2106609"/>
+                  </a:lnTo>
+                  <a:lnTo>
+                    <a:pt x="7183835" y="2097055"/>
+                  </a:lnTo>
+                  <a:lnTo>
+                    <a:pt x="7260303" y="2087423"/>
+                  </a:lnTo>
+                  <a:lnTo>
+                    <a:pt x="7260303" y="3256895"/>
+                  </a:lnTo>
+                  <a:lnTo>
+                    <a:pt x="7183835" y="3255688"/>
+                  </a:lnTo>
+                  <a:lnTo>
+                    <a:pt x="7107366" y="3254384"/>
+                  </a:lnTo>
+                  <a:lnTo>
+                    <a:pt x="7030898" y="3252977"/>
+                  </a:lnTo>
+                  <a:lnTo>
+                    <a:pt x="6954429" y="3251457"/>
+                  </a:lnTo>
+                  <a:lnTo>
+                    <a:pt x="6877961" y="3249816"/>
+                  </a:lnTo>
+                  <a:lnTo>
+                    <a:pt x="6801492" y="3248044"/>
+                  </a:lnTo>
+                  <a:lnTo>
+                    <a:pt x="6725024" y="3246131"/>
+                  </a:lnTo>
+                  <a:lnTo>
+                    <a:pt x="6648556" y="3244065"/>
+                  </a:lnTo>
+                  <a:lnTo>
+                    <a:pt x="6572087" y="3241834"/>
+                  </a:lnTo>
+                  <a:lnTo>
+                    <a:pt x="6495619" y="3239424"/>
+                  </a:lnTo>
+                  <a:lnTo>
+                    <a:pt x="6419150" y="3236823"/>
+                  </a:lnTo>
+                  <a:lnTo>
+                    <a:pt x="6342682" y="3234013"/>
+                  </a:lnTo>
+                  <a:lnTo>
+                    <a:pt x="6266213" y="3230980"/>
+                  </a:lnTo>
+                  <a:lnTo>
+                    <a:pt x="6189745" y="3227704"/>
+                  </a:lnTo>
+                  <a:lnTo>
+                    <a:pt x="6113277" y="3224167"/>
+                  </a:lnTo>
+                  <a:lnTo>
+                    <a:pt x="6036808" y="3220348"/>
+                  </a:lnTo>
+                  <a:lnTo>
+                    <a:pt x="5960340" y="3216223"/>
+                  </a:lnTo>
+                  <a:lnTo>
+                    <a:pt x="5883871" y="3211770"/>
+                  </a:lnTo>
+                  <a:lnTo>
+                    <a:pt x="5807403" y="3206960"/>
+                  </a:lnTo>
+                  <a:lnTo>
+                    <a:pt x="5730934" y="3201767"/>
+                  </a:lnTo>
+                  <a:lnTo>
+                    <a:pt x="5654466" y="3196160"/>
+                  </a:lnTo>
+                  <a:lnTo>
+                    <a:pt x="5577998" y="3190104"/>
+                  </a:lnTo>
+                  <a:lnTo>
+                    <a:pt x="5501529" y="3183566"/>
+                  </a:lnTo>
+                  <a:lnTo>
+                    <a:pt x="5425061" y="3176505"/>
+                  </a:lnTo>
+                  <a:lnTo>
+                    <a:pt x="5348592" y="3168881"/>
+                  </a:lnTo>
+                  <a:lnTo>
+                    <a:pt x="5272124" y="3160648"/>
+                  </a:lnTo>
+                  <a:lnTo>
+                    <a:pt x="5195655" y="3151758"/>
+                  </a:lnTo>
+                  <a:lnTo>
+                    <a:pt x="5119187" y="3142158"/>
+                  </a:lnTo>
+                  <a:lnTo>
+                    <a:pt x="5042719" y="3131792"/>
+                  </a:lnTo>
+                  <a:lnTo>
+                    <a:pt x="4966250" y="3120598"/>
+                  </a:lnTo>
+                  <a:lnTo>
+                    <a:pt x="4889782" y="3108511"/>
+                  </a:lnTo>
+                  <a:lnTo>
+                    <a:pt x="4813313" y="3095458"/>
+                  </a:lnTo>
+                  <a:lnTo>
+                    <a:pt x="4736845" y="3081364"/>
+                  </a:lnTo>
+                  <a:lnTo>
+                    <a:pt x="4660376" y="3066145"/>
+                  </a:lnTo>
+                  <a:lnTo>
+                    <a:pt x="4583908" y="3049711"/>
+                  </a:lnTo>
+                  <a:lnTo>
+                    <a:pt x="4507439" y="3031965"/>
+                  </a:lnTo>
+                  <a:lnTo>
+                    <a:pt x="4430971" y="3012803"/>
+                  </a:lnTo>
+                  <a:lnTo>
+                    <a:pt x="4354503" y="2992110"/>
+                  </a:lnTo>
+                  <a:lnTo>
+                    <a:pt x="4278034" y="2969766"/>
+                  </a:lnTo>
+                  <a:lnTo>
+                    <a:pt x="4201566" y="2945638"/>
+                  </a:lnTo>
+                  <a:lnTo>
+                    <a:pt x="4125097" y="2919584"/>
+                  </a:lnTo>
+                  <a:lnTo>
+                    <a:pt x="4048629" y="2891451"/>
+                  </a:lnTo>
+                  <a:lnTo>
+                    <a:pt x="3972160" y="2861071"/>
+                  </a:lnTo>
+                  <a:lnTo>
+                    <a:pt x="3895692" y="2828266"/>
+                  </a:lnTo>
+                  <a:lnTo>
+                    <a:pt x="3819224" y="2792843"/>
+                  </a:lnTo>
+                  <a:lnTo>
+                    <a:pt x="3742755" y="2754591"/>
+                  </a:lnTo>
+                  <a:lnTo>
+                    <a:pt x="3666287" y="2713287"/>
+                  </a:lnTo>
+                  <a:lnTo>
+                    <a:pt x="3589818" y="2668685"/>
+                  </a:lnTo>
+                  <a:lnTo>
+                    <a:pt x="3513350" y="2620522"/>
+                  </a:lnTo>
+                  <a:lnTo>
+                    <a:pt x="3436881" y="2568515"/>
+                  </a:lnTo>
+                  <a:lnTo>
+                    <a:pt x="3360413" y="2512356"/>
+                  </a:lnTo>
+                  <a:lnTo>
+                    <a:pt x="3283945" y="2497224"/>
+                  </a:lnTo>
+                  <a:lnTo>
+                    <a:pt x="3207476" y="2503524"/>
+                  </a:lnTo>
+                  <a:lnTo>
+                    <a:pt x="3131008" y="2509773"/>
+                  </a:lnTo>
+                  <a:lnTo>
+                    <a:pt x="3054539" y="2515971"/>
+                  </a:lnTo>
+                  <a:lnTo>
+                    <a:pt x="2978071" y="2522119"/>
+                  </a:lnTo>
+                  <a:lnTo>
+                    <a:pt x="2901602" y="2528217"/>
+                  </a:lnTo>
+                  <a:lnTo>
+                    <a:pt x="2825134" y="2534265"/>
+                  </a:lnTo>
+                  <a:lnTo>
+                    <a:pt x="2748666" y="2540264"/>
+                  </a:lnTo>
+                  <a:lnTo>
+                    <a:pt x="2672197" y="2546214"/>
+                  </a:lnTo>
+                  <a:lnTo>
+                    <a:pt x="2595729" y="2552116"/>
+                  </a:lnTo>
+                  <a:lnTo>
+                    <a:pt x="2519260" y="2557969"/>
+                  </a:lnTo>
+                  <a:lnTo>
+                    <a:pt x="2442792" y="2563776"/>
+                  </a:lnTo>
+                  <a:lnTo>
+                    <a:pt x="2366323" y="2569535"/>
+                  </a:lnTo>
+                  <a:lnTo>
+                    <a:pt x="2289855" y="2575247"/>
+                  </a:lnTo>
+                  <a:lnTo>
+                    <a:pt x="2213386" y="2580912"/>
+                  </a:lnTo>
+                  <a:lnTo>
+                    <a:pt x="2136918" y="2586532"/>
+                  </a:lnTo>
+                  <a:lnTo>
+                    <a:pt x="2060450" y="2592106"/>
+                  </a:lnTo>
+                  <a:lnTo>
+                    <a:pt x="1983981" y="2597635"/>
+                  </a:lnTo>
+                  <a:lnTo>
+                    <a:pt x="1907513" y="2603118"/>
+                  </a:lnTo>
+                  <a:lnTo>
+                    <a:pt x="1831044" y="2608557"/>
+                  </a:lnTo>
+                  <a:lnTo>
+                    <a:pt x="1754576" y="2613952"/>
+                  </a:lnTo>
+                  <a:lnTo>
+                    <a:pt x="1678107" y="2619303"/>
+                  </a:lnTo>
+                  <a:lnTo>
+                    <a:pt x="1601639" y="2624611"/>
+                  </a:lnTo>
+                  <a:lnTo>
+                    <a:pt x="1525171" y="2629875"/>
+                  </a:lnTo>
+                  <a:lnTo>
+                    <a:pt x="1448702" y="2635096"/>
+                  </a:lnTo>
+                  <a:lnTo>
+                    <a:pt x="1372234" y="2640275"/>
+                  </a:lnTo>
+                  <a:lnTo>
+                    <a:pt x="1295765" y="2645412"/>
+                  </a:lnTo>
+                  <a:lnTo>
+                    <a:pt x="1219297" y="2650507"/>
+                  </a:lnTo>
+                  <a:lnTo>
+                    <a:pt x="1142828" y="2655561"/>
+                  </a:lnTo>
+                  <a:lnTo>
+                    <a:pt x="1066360" y="2660574"/>
+                  </a:lnTo>
+                  <a:lnTo>
+                    <a:pt x="989892" y="2665546"/>
+                  </a:lnTo>
+                  <a:lnTo>
+                    <a:pt x="913423" y="2670477"/>
+                  </a:lnTo>
+                  <a:lnTo>
+                    <a:pt x="836955" y="2675368"/>
+                  </a:lnTo>
+                  <a:lnTo>
+                    <a:pt x="760486" y="2680220"/>
+                  </a:lnTo>
+                  <a:lnTo>
+                    <a:pt x="684018" y="2685032"/>
+                  </a:lnTo>
+                  <a:lnTo>
+                    <a:pt x="607549" y="2689805"/>
+                  </a:lnTo>
+                  <a:lnTo>
+                    <a:pt x="531081" y="2694539"/>
+                  </a:lnTo>
+                  <a:lnTo>
+                    <a:pt x="454613" y="2699235"/>
+                  </a:lnTo>
+                  <a:lnTo>
+                    <a:pt x="378144" y="2703892"/>
+                  </a:lnTo>
+                  <a:lnTo>
+                    <a:pt x="301676" y="2708512"/>
+                  </a:lnTo>
+                  <a:lnTo>
+                    <a:pt x="225207" y="2713094"/>
+                  </a:lnTo>
+                  <a:lnTo>
+                    <a:pt x="148739" y="2717639"/>
+                  </a:lnTo>
+                  <a:lnTo>
+                    <a:pt x="72270" y="2722147"/>
+                  </a:lnTo>
+                  <a:lnTo>
+                    <a:pt x="0" y="2726372"/>
                   </a:lnTo>
                   <a:close/>
                 </a:path>
@@ -3531,234 +3918,234 @@
         </p:sp>
         <p:sp>
           <p:nvSpPr>
-            <p:cNvPr id="22" name="pl22"/>
+            <p:cNvPr id="31" name="pl31"/>
             <p:cNvSpPr/>
             <p:nvPr/>
           </p:nvSpPr>
           <p:spPr>
             <a:xfrm>
-              <a:off x="2822143" y="2209169"/>
-              <a:ext cx="5353805" cy="2444759"/>
+              <a:off x="2822143" y="2185486"/>
+              <a:ext cx="5353805" cy="2490872"/>
             </a:xfrm>
             <a:custGeom>
               <a:avLst/>
               <a:pathLst>
-                <a:path w="5353805" h="2444759">
+                <a:path w="5353805" h="2490872">
                   <a:moveTo>
                     <a:pt x="0" y="0"/>
                   </a:moveTo>
                   <a:lnTo>
-                    <a:pt x="1015" y="3400"/>
-                  </a:lnTo>
-                  <a:lnTo>
-                    <a:pt x="77483" y="240559"/>
-                  </a:lnTo>
-                  <a:lnTo>
-                    <a:pt x="153952" y="460186"/>
-                  </a:lnTo>
-                  <a:lnTo>
-                    <a:pt x="230420" y="663577"/>
-                  </a:lnTo>
-                  <a:lnTo>
-                    <a:pt x="306889" y="851931"/>
-                  </a:lnTo>
-                  <a:lnTo>
-                    <a:pt x="383357" y="1026362"/>
-                  </a:lnTo>
-                  <a:lnTo>
-                    <a:pt x="459825" y="1187897"/>
-                  </a:lnTo>
-                  <a:lnTo>
-                    <a:pt x="536294" y="1337490"/>
-                  </a:lnTo>
-                  <a:lnTo>
-                    <a:pt x="612762" y="1476025"/>
-                  </a:lnTo>
-                  <a:lnTo>
-                    <a:pt x="689231" y="1604318"/>
-                  </a:lnTo>
-                  <a:lnTo>
-                    <a:pt x="765699" y="1723127"/>
-                  </a:lnTo>
-                  <a:lnTo>
-                    <a:pt x="842168" y="1833153"/>
-                  </a:lnTo>
-                  <a:lnTo>
-                    <a:pt x="918636" y="1935045"/>
-                  </a:lnTo>
-                  <a:lnTo>
-                    <a:pt x="995104" y="2029404"/>
-                  </a:lnTo>
-                  <a:lnTo>
-                    <a:pt x="1071573" y="2116788"/>
-                  </a:lnTo>
-                  <a:lnTo>
-                    <a:pt x="1148041" y="2197712"/>
-                  </a:lnTo>
-                  <a:lnTo>
-                    <a:pt x="1224510" y="2272653"/>
-                  </a:lnTo>
-                  <a:lnTo>
-                    <a:pt x="1300978" y="2342055"/>
-                  </a:lnTo>
-                  <a:lnTo>
-                    <a:pt x="1377447" y="2406325"/>
-                  </a:lnTo>
-                  <a:lnTo>
-                    <a:pt x="1453915" y="2444759"/>
-                  </a:lnTo>
-                  <a:lnTo>
-                    <a:pt x="1530383" y="2438474"/>
-                  </a:lnTo>
-                  <a:lnTo>
-                    <a:pt x="1606852" y="2432137"/>
-                  </a:lnTo>
-                  <a:lnTo>
-                    <a:pt x="1683320" y="2425748"/>
-                  </a:lnTo>
-                  <a:lnTo>
-                    <a:pt x="1759789" y="2419307"/>
-                  </a:lnTo>
-                  <a:lnTo>
-                    <a:pt x="1836257" y="2412813"/>
-                  </a:lnTo>
-                  <a:lnTo>
-                    <a:pt x="1912726" y="2406266"/>
-                  </a:lnTo>
-                  <a:lnTo>
-                    <a:pt x="1989194" y="2399665"/>
-                  </a:lnTo>
-                  <a:lnTo>
-                    <a:pt x="2065662" y="2393010"/>
-                  </a:lnTo>
-                  <a:lnTo>
-                    <a:pt x="2142131" y="2386300"/>
-                  </a:lnTo>
-                  <a:lnTo>
-                    <a:pt x="2218599" y="2379536"/>
-                  </a:lnTo>
-                  <a:lnTo>
-                    <a:pt x="2295068" y="2372716"/>
-                  </a:lnTo>
-                  <a:lnTo>
-                    <a:pt x="2371536" y="2365840"/>
-                  </a:lnTo>
-                  <a:lnTo>
-                    <a:pt x="2448005" y="2358908"/>
-                  </a:lnTo>
-                  <a:lnTo>
-                    <a:pt x="2524473" y="2351919"/>
-                  </a:lnTo>
-                  <a:lnTo>
-                    <a:pt x="2600941" y="2344872"/>
-                  </a:lnTo>
-                  <a:lnTo>
-                    <a:pt x="2677410" y="2337768"/>
-                  </a:lnTo>
-                  <a:lnTo>
-                    <a:pt x="2753878" y="2330606"/>
-                  </a:lnTo>
-                  <a:lnTo>
-                    <a:pt x="2830347" y="2323384"/>
-                  </a:lnTo>
-                  <a:lnTo>
-                    <a:pt x="2906815" y="2316104"/>
-                  </a:lnTo>
-                  <a:lnTo>
-                    <a:pt x="2983284" y="2308764"/>
-                  </a:lnTo>
-                  <a:lnTo>
-                    <a:pt x="3059752" y="2301364"/>
-                  </a:lnTo>
-                  <a:lnTo>
-                    <a:pt x="3136221" y="2293903"/>
-                  </a:lnTo>
-                  <a:lnTo>
-                    <a:pt x="3212689" y="2286381"/>
-                  </a:lnTo>
-                  <a:lnTo>
-                    <a:pt x="3289157" y="2278797"/>
-                  </a:lnTo>
-                  <a:lnTo>
-                    <a:pt x="3365626" y="2271152"/>
-                  </a:lnTo>
-                  <a:lnTo>
-                    <a:pt x="3442094" y="2263443"/>
-                  </a:lnTo>
-                  <a:lnTo>
-                    <a:pt x="3518563" y="2255671"/>
-                  </a:lnTo>
-                  <a:lnTo>
-                    <a:pt x="3595031" y="2247836"/>
-                  </a:lnTo>
-                  <a:lnTo>
-                    <a:pt x="3671500" y="2239936"/>
-                  </a:lnTo>
-                  <a:lnTo>
-                    <a:pt x="3747968" y="2231972"/>
-                  </a:lnTo>
-                  <a:lnTo>
-                    <a:pt x="3824436" y="2223942"/>
-                  </a:lnTo>
-                  <a:lnTo>
-                    <a:pt x="3900905" y="2215846"/>
-                  </a:lnTo>
-                  <a:lnTo>
-                    <a:pt x="3977373" y="2207684"/>
-                  </a:lnTo>
-                  <a:lnTo>
-                    <a:pt x="4053842" y="2199456"/>
-                  </a:lnTo>
-                  <a:lnTo>
-                    <a:pt x="4130310" y="2191159"/>
-                  </a:lnTo>
-                  <a:lnTo>
-                    <a:pt x="4206779" y="2182795"/>
-                  </a:lnTo>
-                  <a:lnTo>
-                    <a:pt x="4283247" y="2174362"/>
-                  </a:lnTo>
-                  <a:lnTo>
-                    <a:pt x="4359715" y="2165860"/>
-                  </a:lnTo>
-                  <a:lnTo>
-                    <a:pt x="4436184" y="2157288"/>
-                  </a:lnTo>
-                  <a:lnTo>
-                    <a:pt x="4512652" y="2148646"/>
-                  </a:lnTo>
-                  <a:lnTo>
-                    <a:pt x="4589121" y="2139934"/>
-                  </a:lnTo>
-                  <a:lnTo>
-                    <a:pt x="4665589" y="2131149"/>
-                  </a:lnTo>
-                  <a:lnTo>
-                    <a:pt x="4742058" y="2122293"/>
-                  </a:lnTo>
-                  <a:lnTo>
-                    <a:pt x="4818526" y="2113364"/>
-                  </a:lnTo>
-                  <a:lnTo>
-                    <a:pt x="4894994" y="2104362"/>
-                  </a:lnTo>
-                  <a:lnTo>
-                    <a:pt x="4971463" y="2095286"/>
-                  </a:lnTo>
-                  <a:lnTo>
-                    <a:pt x="5047931" y="2086136"/>
-                  </a:lnTo>
-                  <a:lnTo>
-                    <a:pt x="5124400" y="2076911"/>
-                  </a:lnTo>
-                  <a:lnTo>
-                    <a:pt x="5200868" y="2067610"/>
-                  </a:lnTo>
-                  <a:lnTo>
-                    <a:pt x="5277337" y="2058232"/>
-                  </a:lnTo>
-                  <a:lnTo>
-                    <a:pt x="5353805" y="2048778"/>
+                    <a:pt x="1015" y="3464"/>
+                  </a:lnTo>
+                  <a:lnTo>
+                    <a:pt x="77483" y="245096"/>
+                  </a:lnTo>
+                  <a:lnTo>
+                    <a:pt x="153952" y="468866"/>
+                  </a:lnTo>
+                  <a:lnTo>
+                    <a:pt x="230420" y="676093"/>
+                  </a:lnTo>
+                  <a:lnTo>
+                    <a:pt x="306889" y="868001"/>
+                  </a:lnTo>
+                  <a:lnTo>
+                    <a:pt x="383357" y="1045721"/>
+                  </a:lnTo>
+                  <a:lnTo>
+                    <a:pt x="459825" y="1210303"/>
+                  </a:lnTo>
+                  <a:lnTo>
+                    <a:pt x="536294" y="1362719"/>
+                  </a:lnTo>
+                  <a:lnTo>
+                    <a:pt x="612762" y="1503866"/>
+                  </a:lnTo>
+                  <a:lnTo>
+                    <a:pt x="689231" y="1634579"/>
+                  </a:lnTo>
+                  <a:lnTo>
+                    <a:pt x="765699" y="1755629"/>
+                  </a:lnTo>
+                  <a:lnTo>
+                    <a:pt x="842168" y="1867730"/>
+                  </a:lnTo>
+                  <a:lnTo>
+                    <a:pt x="918636" y="1971544"/>
+                  </a:lnTo>
+                  <a:lnTo>
+                    <a:pt x="995104" y="2067683"/>
+                  </a:lnTo>
+                  <a:lnTo>
+                    <a:pt x="1071573" y="2156715"/>
+                  </a:lnTo>
+                  <a:lnTo>
+                    <a:pt x="1148041" y="2239166"/>
+                  </a:lnTo>
+                  <a:lnTo>
+                    <a:pt x="1224510" y="2315521"/>
+                  </a:lnTo>
+                  <a:lnTo>
+                    <a:pt x="1300978" y="2386231"/>
+                  </a:lnTo>
+                  <a:lnTo>
+                    <a:pt x="1377447" y="2451714"/>
+                  </a:lnTo>
+                  <a:lnTo>
+                    <a:pt x="1453915" y="2490872"/>
+                  </a:lnTo>
+                  <a:lnTo>
+                    <a:pt x="1530383" y="2484469"/>
+                  </a:lnTo>
+                  <a:lnTo>
+                    <a:pt x="1606852" y="2478012"/>
+                  </a:lnTo>
+                  <a:lnTo>
+                    <a:pt x="1683320" y="2471503"/>
+                  </a:lnTo>
+                  <a:lnTo>
+                    <a:pt x="1759789" y="2464940"/>
+                  </a:lnTo>
+                  <a:lnTo>
+                    <a:pt x="1836257" y="2458324"/>
+                  </a:lnTo>
+                  <a:lnTo>
+                    <a:pt x="1912726" y="2451653"/>
+                  </a:lnTo>
+                  <a:lnTo>
+                    <a:pt x="1989194" y="2444928"/>
+                  </a:lnTo>
+                  <a:lnTo>
+                    <a:pt x="2065662" y="2438147"/>
+                  </a:lnTo>
+                  <a:lnTo>
+                    <a:pt x="2142131" y="2431311"/>
+                  </a:lnTo>
+                  <a:lnTo>
+                    <a:pt x="2218599" y="2424419"/>
+                  </a:lnTo>
+                  <a:lnTo>
+                    <a:pt x="2295068" y="2417471"/>
+                  </a:lnTo>
+                  <a:lnTo>
+                    <a:pt x="2371536" y="2410465"/>
+                  </a:lnTo>
+                  <a:lnTo>
+                    <a:pt x="2448005" y="2403402"/>
+                  </a:lnTo>
+                  <a:lnTo>
+                    <a:pt x="2524473" y="2396281"/>
+                  </a:lnTo>
+                  <a:lnTo>
+                    <a:pt x="2600941" y="2389102"/>
+                  </a:lnTo>
+                  <a:lnTo>
+                    <a:pt x="2677410" y="2381863"/>
+                  </a:lnTo>
+                  <a:lnTo>
+                    <a:pt x="2753878" y="2374566"/>
+                  </a:lnTo>
+                  <a:lnTo>
+                    <a:pt x="2830347" y="2367209"/>
+                  </a:lnTo>
+                  <a:lnTo>
+                    <a:pt x="2906815" y="2359791"/>
+                  </a:lnTo>
+                  <a:lnTo>
+                    <a:pt x="2983284" y="2352313"/>
+                  </a:lnTo>
+                  <a:lnTo>
+                    <a:pt x="3059752" y="2344773"/>
+                  </a:lnTo>
+                  <a:lnTo>
+                    <a:pt x="3136221" y="2337171"/>
+                  </a:lnTo>
+                  <a:lnTo>
+                    <a:pt x="3212689" y="2329507"/>
+                  </a:lnTo>
+                  <a:lnTo>
+                    <a:pt x="3289157" y="2321781"/>
+                  </a:lnTo>
+                  <a:lnTo>
+                    <a:pt x="3365626" y="2313990"/>
+                  </a:lnTo>
+                  <a:lnTo>
+                    <a:pt x="3442094" y="2306137"/>
+                  </a:lnTo>
+                  <a:lnTo>
+                    <a:pt x="3518563" y="2298218"/>
+                  </a:lnTo>
+                  <a:lnTo>
+                    <a:pt x="3595031" y="2290235"/>
+                  </a:lnTo>
+                  <a:lnTo>
+                    <a:pt x="3671500" y="2282186"/>
+                  </a:lnTo>
+                  <a:lnTo>
+                    <a:pt x="3747968" y="2274072"/>
+                  </a:lnTo>
+                  <a:lnTo>
+                    <a:pt x="3824436" y="2265890"/>
+                  </a:lnTo>
+                  <a:lnTo>
+                    <a:pt x="3900905" y="2257642"/>
+                  </a:lnTo>
+                  <a:lnTo>
+                    <a:pt x="3977373" y="2249326"/>
+                  </a:lnTo>
+                  <a:lnTo>
+                    <a:pt x="4053842" y="2240942"/>
+                  </a:lnTo>
+                  <a:lnTo>
+                    <a:pt x="4130310" y="2232489"/>
+                  </a:lnTo>
+                  <a:lnTo>
+                    <a:pt x="4206779" y="2223967"/>
+                  </a:lnTo>
+                  <a:lnTo>
+                    <a:pt x="4283247" y="2215375"/>
+                  </a:lnTo>
+                  <a:lnTo>
+                    <a:pt x="4359715" y="2206713"/>
+                  </a:lnTo>
+                  <a:lnTo>
+                    <a:pt x="4436184" y="2197980"/>
+                  </a:lnTo>
+                  <a:lnTo>
+                    <a:pt x="4512652" y="2189175"/>
+                  </a:lnTo>
+                  <a:lnTo>
+                    <a:pt x="4589121" y="2180297"/>
+                  </a:lnTo>
+                  <a:lnTo>
+                    <a:pt x="4665589" y="2171347"/>
+                  </a:lnTo>
+                  <a:lnTo>
+                    <a:pt x="4742058" y="2162324"/>
+                  </a:lnTo>
+                  <a:lnTo>
+                    <a:pt x="4818526" y="2153227"/>
+                  </a:lnTo>
+                  <a:lnTo>
+                    <a:pt x="4894994" y="2144055"/>
+                  </a:lnTo>
+                  <a:lnTo>
+                    <a:pt x="4971463" y="2134808"/>
+                  </a:lnTo>
+                  <a:lnTo>
+                    <a:pt x="5047931" y="2125485"/>
+                  </a:lnTo>
+                  <a:lnTo>
+                    <a:pt x="5124400" y="2116086"/>
+                  </a:lnTo>
+                  <a:lnTo>
+                    <a:pt x="5200868" y="2106609"/>
+                  </a:lnTo>
+                  <a:lnTo>
+                    <a:pt x="5277337" y="2097055"/>
+                  </a:lnTo>
+                  <a:lnTo>
+                    <a:pt x="5353805" y="2087423"/>
                   </a:lnTo>
                 </a:path>
               </a:pathLst>
@@ -3772,306 +4159,306 @@
         </p:sp>
         <p:sp>
           <p:nvSpPr>
-            <p:cNvPr id="23" name="pl23"/>
+            <p:cNvPr id="32" name="pl32"/>
             <p:cNvSpPr/>
             <p:nvPr/>
           </p:nvSpPr>
           <p:spPr>
             <a:xfrm>
-              <a:off x="915645" y="4660162"/>
-              <a:ext cx="7260303" cy="745606"/>
+              <a:off x="915645" y="4682711"/>
+              <a:ext cx="7260303" cy="759670"/>
             </a:xfrm>
             <a:custGeom>
               <a:avLst/>
               <a:pathLst>
-                <a:path w="7260303" h="745606">
+                <a:path w="7260303" h="759670">
                   <a:moveTo>
-                    <a:pt x="7260303" y="745606"/>
+                    <a:pt x="7260303" y="759670"/>
                   </a:moveTo>
                   <a:lnTo>
-                    <a:pt x="7183835" y="744421"/>
-                  </a:lnTo>
-                  <a:lnTo>
-                    <a:pt x="7107366" y="743142"/>
-                  </a:lnTo>
-                  <a:lnTo>
-                    <a:pt x="7030898" y="741761"/>
-                  </a:lnTo>
-                  <a:lnTo>
-                    <a:pt x="6954429" y="740269"/>
-                  </a:lnTo>
-                  <a:lnTo>
-                    <a:pt x="6877961" y="738659"/>
-                  </a:lnTo>
-                  <a:lnTo>
-                    <a:pt x="6801492" y="736920"/>
-                  </a:lnTo>
-                  <a:lnTo>
-                    <a:pt x="6725024" y="735042"/>
-                  </a:lnTo>
-                  <a:lnTo>
-                    <a:pt x="6648556" y="733014"/>
-                  </a:lnTo>
-                  <a:lnTo>
-                    <a:pt x="6572087" y="730824"/>
-                  </a:lnTo>
-                  <a:lnTo>
-                    <a:pt x="6495619" y="728459"/>
-                  </a:lnTo>
-                  <a:lnTo>
-                    <a:pt x="6419150" y="725906"/>
-                  </a:lnTo>
-                  <a:lnTo>
-                    <a:pt x="6342682" y="723149"/>
-                  </a:lnTo>
-                  <a:lnTo>
-                    <a:pt x="6266213" y="720171"/>
-                  </a:lnTo>
-                  <a:lnTo>
-                    <a:pt x="6189745" y="716956"/>
-                  </a:lnTo>
-                  <a:lnTo>
-                    <a:pt x="6113277" y="713485"/>
-                  </a:lnTo>
-                  <a:lnTo>
-                    <a:pt x="6036808" y="709736"/>
-                  </a:lnTo>
-                  <a:lnTo>
-                    <a:pt x="5960340" y="705688"/>
-                  </a:lnTo>
-                  <a:lnTo>
-                    <a:pt x="5883871" y="701316"/>
-                  </a:lnTo>
-                  <a:lnTo>
-                    <a:pt x="5807403" y="696596"/>
-                  </a:lnTo>
-                  <a:lnTo>
-                    <a:pt x="5730934" y="691499"/>
-                  </a:lnTo>
-                  <a:lnTo>
-                    <a:pt x="5654466" y="685995"/>
-                  </a:lnTo>
-                  <a:lnTo>
-                    <a:pt x="5577998" y="680052"/>
-                  </a:lnTo>
-                  <a:lnTo>
-                    <a:pt x="5501529" y="673635"/>
-                  </a:lnTo>
-                  <a:lnTo>
-                    <a:pt x="5425061" y="666705"/>
-                  </a:lnTo>
-                  <a:lnTo>
-                    <a:pt x="5348592" y="659222"/>
-                  </a:lnTo>
-                  <a:lnTo>
-                    <a:pt x="5272124" y="651141"/>
-                  </a:lnTo>
-                  <a:lnTo>
-                    <a:pt x="5195655" y="642415"/>
-                  </a:lnTo>
-                  <a:lnTo>
-                    <a:pt x="5119187" y="632993"/>
-                  </a:lnTo>
-                  <a:lnTo>
-                    <a:pt x="5042719" y="622819"/>
-                  </a:lnTo>
-                  <a:lnTo>
-                    <a:pt x="4966250" y="611833"/>
-                  </a:lnTo>
-                  <a:lnTo>
-                    <a:pt x="4889782" y="599969"/>
-                  </a:lnTo>
-                  <a:lnTo>
-                    <a:pt x="4813313" y="587159"/>
-                  </a:lnTo>
-                  <a:lnTo>
-                    <a:pt x="4736845" y="573325"/>
-                  </a:lnTo>
-                  <a:lnTo>
-                    <a:pt x="4660376" y="558388"/>
-                  </a:lnTo>
-                  <a:lnTo>
-                    <a:pt x="4583908" y="542258"/>
-                  </a:lnTo>
-                  <a:lnTo>
-                    <a:pt x="4507439" y="524841"/>
-                  </a:lnTo>
-                  <a:lnTo>
-                    <a:pt x="4430971" y="506033"/>
-                  </a:lnTo>
-                  <a:lnTo>
-                    <a:pt x="4354503" y="485724"/>
-                  </a:lnTo>
-                  <a:lnTo>
-                    <a:pt x="4278034" y="463793"/>
-                  </a:lnTo>
-                  <a:lnTo>
-                    <a:pt x="4201566" y="440112"/>
-                  </a:lnTo>
-                  <a:lnTo>
-                    <a:pt x="4125097" y="414540"/>
-                  </a:lnTo>
-                  <a:lnTo>
-                    <a:pt x="4048629" y="386928"/>
-                  </a:lnTo>
-                  <a:lnTo>
-                    <a:pt x="3972160" y="357110"/>
-                  </a:lnTo>
-                  <a:lnTo>
-                    <a:pt x="3895692" y="324913"/>
-                  </a:lnTo>
-                  <a:lnTo>
-                    <a:pt x="3819224" y="290145"/>
-                  </a:lnTo>
-                  <a:lnTo>
-                    <a:pt x="3742755" y="252602"/>
-                  </a:lnTo>
-                  <a:lnTo>
-                    <a:pt x="3666287" y="212062"/>
-                  </a:lnTo>
-                  <a:lnTo>
-                    <a:pt x="3589818" y="168286"/>
-                  </a:lnTo>
-                  <a:lnTo>
-                    <a:pt x="3513350" y="121015"/>
-                  </a:lnTo>
-                  <a:lnTo>
-                    <a:pt x="3436881" y="69970"/>
-                  </a:lnTo>
-                  <a:lnTo>
-                    <a:pt x="3360413" y="14851"/>
+                    <a:pt x="7183835" y="758463"/>
+                  </a:lnTo>
+                  <a:lnTo>
+                    <a:pt x="7107366" y="757160"/>
+                  </a:lnTo>
+                  <a:lnTo>
+                    <a:pt x="7030898" y="755752"/>
+                  </a:lnTo>
+                  <a:lnTo>
+                    <a:pt x="6954429" y="754233"/>
+                  </a:lnTo>
+                  <a:lnTo>
+                    <a:pt x="6877961" y="752592"/>
+                  </a:lnTo>
+                  <a:lnTo>
+                    <a:pt x="6801492" y="750820"/>
+                  </a:lnTo>
+                  <a:lnTo>
+                    <a:pt x="6725024" y="748906"/>
+                  </a:lnTo>
+                  <a:lnTo>
+                    <a:pt x="6648556" y="746840"/>
+                  </a:lnTo>
+                  <a:lnTo>
+                    <a:pt x="6572087" y="744609"/>
+                  </a:lnTo>
+                  <a:lnTo>
+                    <a:pt x="6495619" y="742200"/>
+                  </a:lnTo>
+                  <a:lnTo>
+                    <a:pt x="6419150" y="739598"/>
+                  </a:lnTo>
+                  <a:lnTo>
+                    <a:pt x="6342682" y="736789"/>
+                  </a:lnTo>
+                  <a:lnTo>
+                    <a:pt x="6266213" y="733755"/>
+                  </a:lnTo>
+                  <a:lnTo>
+                    <a:pt x="6189745" y="730480"/>
+                  </a:lnTo>
+                  <a:lnTo>
+                    <a:pt x="6113277" y="726942"/>
+                  </a:lnTo>
+                  <a:lnTo>
+                    <a:pt x="6036808" y="723123"/>
+                  </a:lnTo>
+                  <a:lnTo>
+                    <a:pt x="5960340" y="718998"/>
+                  </a:lnTo>
+                  <a:lnTo>
+                    <a:pt x="5883871" y="714545"/>
+                  </a:lnTo>
+                  <a:lnTo>
+                    <a:pt x="5807403" y="709736"/>
+                  </a:lnTo>
+                  <a:lnTo>
+                    <a:pt x="5730934" y="704543"/>
+                  </a:lnTo>
+                  <a:lnTo>
+                    <a:pt x="5654466" y="698935"/>
+                  </a:lnTo>
+                  <a:lnTo>
+                    <a:pt x="5577998" y="692880"/>
+                  </a:lnTo>
+                  <a:lnTo>
+                    <a:pt x="5501529" y="686341"/>
+                  </a:lnTo>
+                  <a:lnTo>
+                    <a:pt x="5425061" y="679280"/>
+                  </a:lnTo>
+                  <a:lnTo>
+                    <a:pt x="5348592" y="671656"/>
+                  </a:lnTo>
+                  <a:lnTo>
+                    <a:pt x="5272124" y="663423"/>
+                  </a:lnTo>
+                  <a:lnTo>
+                    <a:pt x="5195655" y="654533"/>
+                  </a:lnTo>
+                  <a:lnTo>
+                    <a:pt x="5119187" y="644933"/>
+                  </a:lnTo>
+                  <a:lnTo>
+                    <a:pt x="5042719" y="634567"/>
+                  </a:lnTo>
+                  <a:lnTo>
+                    <a:pt x="4966250" y="623373"/>
+                  </a:lnTo>
+                  <a:lnTo>
+                    <a:pt x="4889782" y="611286"/>
+                  </a:lnTo>
+                  <a:lnTo>
+                    <a:pt x="4813313" y="598234"/>
+                  </a:lnTo>
+                  <a:lnTo>
+                    <a:pt x="4736845" y="584140"/>
+                  </a:lnTo>
+                  <a:lnTo>
+                    <a:pt x="4660376" y="568921"/>
+                  </a:lnTo>
+                  <a:lnTo>
+                    <a:pt x="4583908" y="552486"/>
+                  </a:lnTo>
+                  <a:lnTo>
+                    <a:pt x="4507439" y="534740"/>
+                  </a:lnTo>
+                  <a:lnTo>
+                    <a:pt x="4430971" y="515578"/>
+                  </a:lnTo>
+                  <a:lnTo>
+                    <a:pt x="4354503" y="494886"/>
+                  </a:lnTo>
+                  <a:lnTo>
+                    <a:pt x="4278034" y="472541"/>
+                  </a:lnTo>
+                  <a:lnTo>
+                    <a:pt x="4201566" y="448414"/>
+                  </a:lnTo>
+                  <a:lnTo>
+                    <a:pt x="4125097" y="422360"/>
+                  </a:lnTo>
+                  <a:lnTo>
+                    <a:pt x="4048629" y="394226"/>
+                  </a:lnTo>
+                  <a:lnTo>
+                    <a:pt x="3972160" y="363846"/>
+                  </a:lnTo>
+                  <a:lnTo>
+                    <a:pt x="3895692" y="331041"/>
+                  </a:lnTo>
+                  <a:lnTo>
+                    <a:pt x="3819224" y="295618"/>
+                  </a:lnTo>
+                  <a:lnTo>
+                    <a:pt x="3742755" y="257367"/>
+                  </a:lnTo>
+                  <a:lnTo>
+                    <a:pt x="3666287" y="216062"/>
+                  </a:lnTo>
+                  <a:lnTo>
+                    <a:pt x="3589818" y="171460"/>
+                  </a:lnTo>
+                  <a:lnTo>
+                    <a:pt x="3513350" y="123297"/>
+                  </a:lnTo>
+                  <a:lnTo>
+                    <a:pt x="3436881" y="71290"/>
+                  </a:lnTo>
+                  <a:lnTo>
+                    <a:pt x="3360413" y="15131"/>
                   </a:lnTo>
                   <a:lnTo>
                     <a:pt x="3283945" y="0"/>
                   </a:lnTo>
                   <a:lnTo>
-                    <a:pt x="3207476" y="6183"/>
-                  </a:lnTo>
-                  <a:lnTo>
-                    <a:pt x="3131008" y="12316"/>
-                  </a:lnTo>
-                  <a:lnTo>
-                    <a:pt x="3054539" y="18400"/>
-                  </a:lnTo>
-                  <a:lnTo>
-                    <a:pt x="2978071" y="24433"/>
-                  </a:lnTo>
-                  <a:lnTo>
-                    <a:pt x="2901602" y="30418"/>
-                  </a:lnTo>
-                  <a:lnTo>
-                    <a:pt x="2825134" y="36354"/>
-                  </a:lnTo>
-                  <a:lnTo>
-                    <a:pt x="2748666" y="42242"/>
-                  </a:lnTo>
-                  <a:lnTo>
-                    <a:pt x="2672197" y="48082"/>
-                  </a:lnTo>
-                  <a:lnTo>
-                    <a:pt x="2595729" y="53875"/>
-                  </a:lnTo>
-                  <a:lnTo>
-                    <a:pt x="2519260" y="59620"/>
-                  </a:lnTo>
-                  <a:lnTo>
-                    <a:pt x="2442792" y="65319"/>
-                  </a:lnTo>
-                  <a:lnTo>
-                    <a:pt x="2366323" y="70971"/>
-                  </a:lnTo>
-                  <a:lnTo>
-                    <a:pt x="2289855" y="76578"/>
-                  </a:lnTo>
-                  <a:lnTo>
-                    <a:pt x="2213386" y="82138"/>
-                  </a:lnTo>
-                  <a:lnTo>
-                    <a:pt x="2136918" y="87654"/>
-                  </a:lnTo>
-                  <a:lnTo>
-                    <a:pt x="2060450" y="93125"/>
-                  </a:lnTo>
-                  <a:lnTo>
-                    <a:pt x="1983981" y="98551"/>
-                  </a:lnTo>
-                  <a:lnTo>
-                    <a:pt x="1907513" y="103933"/>
-                  </a:lnTo>
-                  <a:lnTo>
-                    <a:pt x="1831044" y="109271"/>
-                  </a:lnTo>
-                  <a:lnTo>
-                    <a:pt x="1754576" y="114566"/>
-                  </a:lnTo>
-                  <a:lnTo>
-                    <a:pt x="1678107" y="119818"/>
-                  </a:lnTo>
-                  <a:lnTo>
-                    <a:pt x="1601639" y="125028"/>
-                  </a:lnTo>
-                  <a:lnTo>
-                    <a:pt x="1525171" y="130194"/>
-                  </a:lnTo>
-                  <a:lnTo>
-                    <a:pt x="1448702" y="135319"/>
-                  </a:lnTo>
-                  <a:lnTo>
-                    <a:pt x="1372234" y="140402"/>
-                  </a:lnTo>
-                  <a:lnTo>
-                    <a:pt x="1295765" y="145444"/>
-                  </a:lnTo>
-                  <a:lnTo>
-                    <a:pt x="1219297" y="150445"/>
-                  </a:lnTo>
-                  <a:lnTo>
-                    <a:pt x="1142828" y="155405"/>
-                  </a:lnTo>
-                  <a:lnTo>
-                    <a:pt x="1066360" y="160325"/>
-                  </a:lnTo>
-                  <a:lnTo>
-                    <a:pt x="989892" y="165205"/>
-                  </a:lnTo>
-                  <a:lnTo>
-                    <a:pt x="913423" y="170045"/>
-                  </a:lnTo>
-                  <a:lnTo>
-                    <a:pt x="836955" y="174846"/>
-                  </a:lnTo>
-                  <a:lnTo>
-                    <a:pt x="760486" y="179607"/>
-                  </a:lnTo>
-                  <a:lnTo>
-                    <a:pt x="684018" y="184330"/>
-                  </a:lnTo>
-                  <a:lnTo>
-                    <a:pt x="607549" y="189015"/>
-                  </a:lnTo>
-                  <a:lnTo>
-                    <a:pt x="531081" y="193662"/>
-                  </a:lnTo>
-                  <a:lnTo>
-                    <a:pt x="454613" y="198270"/>
-                  </a:lnTo>
-                  <a:lnTo>
-                    <a:pt x="378144" y="202842"/>
-                  </a:lnTo>
-                  <a:lnTo>
-                    <a:pt x="301676" y="207376"/>
-                  </a:lnTo>
-                  <a:lnTo>
-                    <a:pt x="225207" y="211873"/>
-                  </a:lnTo>
-                  <a:lnTo>
-                    <a:pt x="148739" y="216334"/>
-                  </a:lnTo>
-                  <a:lnTo>
-                    <a:pt x="72270" y="220758"/>
-                  </a:lnTo>
-                  <a:lnTo>
-                    <a:pt x="0" y="224906"/>
+                    <a:pt x="3207476" y="6300"/>
+                  </a:lnTo>
+                  <a:lnTo>
+                    <a:pt x="3131008" y="12549"/>
+                  </a:lnTo>
+                  <a:lnTo>
+                    <a:pt x="3054539" y="18747"/>
+                  </a:lnTo>
+                  <a:lnTo>
+                    <a:pt x="2978071" y="24894"/>
+                  </a:lnTo>
+                  <a:lnTo>
+                    <a:pt x="2901602" y="30992"/>
+                  </a:lnTo>
+                  <a:lnTo>
+                    <a:pt x="2825134" y="37040"/>
+                  </a:lnTo>
+                  <a:lnTo>
+                    <a:pt x="2748666" y="43039"/>
+                  </a:lnTo>
+                  <a:lnTo>
+                    <a:pt x="2672197" y="48989"/>
+                  </a:lnTo>
+                  <a:lnTo>
+                    <a:pt x="2595729" y="54891"/>
+                  </a:lnTo>
+                  <a:lnTo>
+                    <a:pt x="2519260" y="60745"/>
+                  </a:lnTo>
+                  <a:lnTo>
+                    <a:pt x="2442792" y="66551"/>
+                  </a:lnTo>
+                  <a:lnTo>
+                    <a:pt x="2366323" y="72310"/>
+                  </a:lnTo>
+                  <a:lnTo>
+                    <a:pt x="2289855" y="78022"/>
+                  </a:lnTo>
+                  <a:lnTo>
+                    <a:pt x="2213386" y="83688"/>
+                  </a:lnTo>
+                  <a:lnTo>
+                    <a:pt x="2136918" y="89307"/>
+                  </a:lnTo>
+                  <a:lnTo>
+                    <a:pt x="2060450" y="94881"/>
+                  </a:lnTo>
+                  <a:lnTo>
+                    <a:pt x="1983981" y="100410"/>
+                  </a:lnTo>
+                  <a:lnTo>
+                    <a:pt x="1907513" y="105894"/>
+                  </a:lnTo>
+                  <a:lnTo>
+                    <a:pt x="1831044" y="111333"/>
+                  </a:lnTo>
+                  <a:lnTo>
+                    <a:pt x="1754576" y="116727"/>
+                  </a:lnTo>
+                  <a:lnTo>
+                    <a:pt x="1678107" y="122078"/>
+                  </a:lnTo>
+                  <a:lnTo>
+                    <a:pt x="1601639" y="127386"/>
+                  </a:lnTo>
+                  <a:lnTo>
+                    <a:pt x="1525171" y="132650"/>
+                  </a:lnTo>
+                  <a:lnTo>
+                    <a:pt x="1448702" y="137872"/>
+                  </a:lnTo>
+                  <a:lnTo>
+                    <a:pt x="1372234" y="143051"/>
+                  </a:lnTo>
+                  <a:lnTo>
+                    <a:pt x="1295765" y="148188"/>
+                  </a:lnTo>
+                  <a:lnTo>
+                    <a:pt x="1219297" y="153283"/>
+                  </a:lnTo>
+                  <a:lnTo>
+                    <a:pt x="1142828" y="158336"/>
+                  </a:lnTo>
+                  <a:lnTo>
+                    <a:pt x="1066360" y="163349"/>
+                  </a:lnTo>
+                  <a:lnTo>
+                    <a:pt x="989892" y="168321"/>
+                  </a:lnTo>
+                  <a:lnTo>
+                    <a:pt x="913423" y="173252"/>
+                  </a:lnTo>
+                  <a:lnTo>
+                    <a:pt x="836955" y="178144"/>
+                  </a:lnTo>
+                  <a:lnTo>
+                    <a:pt x="760486" y="182995"/>
+                  </a:lnTo>
+                  <a:lnTo>
+                    <a:pt x="684018" y="187807"/>
+                  </a:lnTo>
+                  <a:lnTo>
+                    <a:pt x="607549" y="192580"/>
+                  </a:lnTo>
+                  <a:lnTo>
+                    <a:pt x="531081" y="197315"/>
+                  </a:lnTo>
+                  <a:lnTo>
+                    <a:pt x="454613" y="202010"/>
+                  </a:lnTo>
+                  <a:lnTo>
+                    <a:pt x="378144" y="206668"/>
+                  </a:lnTo>
+                  <a:lnTo>
+                    <a:pt x="301676" y="211287"/>
+                  </a:lnTo>
+                  <a:lnTo>
+                    <a:pt x="225207" y="215869"/>
+                  </a:lnTo>
+                  <a:lnTo>
+                    <a:pt x="148739" y="220414"/>
+                  </a:lnTo>
+                  <a:lnTo>
+                    <a:pt x="72270" y="224922"/>
+                  </a:lnTo>
+                  <a:lnTo>
+                    <a:pt x="0" y="229148"/>
                   </a:lnTo>
                 </a:path>
               </a:pathLst>
@@ -4085,303 +4472,303 @@
         </p:sp>
         <p:sp>
           <p:nvSpPr>
-            <p:cNvPr id="24" name="pl24"/>
+            <p:cNvPr id="33" name="pl33"/>
             <p:cNvSpPr/>
             <p:nvPr/>
           </p:nvSpPr>
           <p:spPr>
             <a:xfrm>
-              <a:off x="1053473" y="2209169"/>
-              <a:ext cx="7122475" cy="3080087"/>
+              <a:off x="1053473" y="2185486"/>
+              <a:ext cx="7122475" cy="3138185"/>
             </a:xfrm>
             <a:custGeom>
               <a:avLst/>
               <a:pathLst>
-                <a:path w="7122475" h="3080087">
+                <a:path w="7122475" h="3138185">
                   <a:moveTo>
                     <a:pt x="0" y="0"/>
                   </a:moveTo>
                   <a:lnTo>
-                    <a:pt x="10910" y="15919"/>
-                  </a:lnTo>
-                  <a:lnTo>
-                    <a:pt x="87379" y="123724"/>
-                  </a:lnTo>
-                  <a:lnTo>
-                    <a:pt x="163847" y="227892"/>
-                  </a:lnTo>
-                  <a:lnTo>
-                    <a:pt x="240316" y="328546"/>
-                  </a:lnTo>
-                  <a:lnTo>
-                    <a:pt x="316784" y="425804"/>
-                  </a:lnTo>
-                  <a:lnTo>
-                    <a:pt x="393253" y="519782"/>
-                  </a:lnTo>
-                  <a:lnTo>
-                    <a:pt x="469721" y="610588"/>
-                  </a:lnTo>
-                  <a:lnTo>
-                    <a:pt x="546189" y="698331"/>
-                  </a:lnTo>
-                  <a:lnTo>
-                    <a:pt x="622658" y="783115"/>
-                  </a:lnTo>
-                  <a:lnTo>
-                    <a:pt x="699126" y="865037"/>
-                  </a:lnTo>
-                  <a:lnTo>
-                    <a:pt x="775595" y="944196"/>
-                  </a:lnTo>
-                  <a:lnTo>
-                    <a:pt x="852063" y="1020685"/>
-                  </a:lnTo>
-                  <a:lnTo>
-                    <a:pt x="928532" y="1094593"/>
-                  </a:lnTo>
-                  <a:lnTo>
-                    <a:pt x="1005000" y="1166008"/>
-                  </a:lnTo>
-                  <a:lnTo>
-                    <a:pt x="1081468" y="1235013"/>
-                  </a:lnTo>
-                  <a:lnTo>
-                    <a:pt x="1157937" y="1301690"/>
-                  </a:lnTo>
-                  <a:lnTo>
-                    <a:pt x="1234405" y="1366118"/>
-                  </a:lnTo>
-                  <a:lnTo>
-                    <a:pt x="1310874" y="1428373"/>
-                  </a:lnTo>
-                  <a:lnTo>
-                    <a:pt x="1387342" y="1488527"/>
-                  </a:lnTo>
-                  <a:lnTo>
-                    <a:pt x="1463811" y="1546652"/>
-                  </a:lnTo>
-                  <a:lnTo>
-                    <a:pt x="1540279" y="1602816"/>
-                  </a:lnTo>
-                  <a:lnTo>
-                    <a:pt x="1616747" y="1657085"/>
-                  </a:lnTo>
-                  <a:lnTo>
-                    <a:pt x="1693216" y="1709523"/>
-                  </a:lnTo>
-                  <a:lnTo>
-                    <a:pt x="1769684" y="1760192"/>
-                  </a:lnTo>
-                  <a:lnTo>
-                    <a:pt x="1846153" y="1809152"/>
-                  </a:lnTo>
-                  <a:lnTo>
-                    <a:pt x="1922621" y="1856460"/>
-                  </a:lnTo>
-                  <a:lnTo>
-                    <a:pt x="1999090" y="1902172"/>
-                  </a:lnTo>
-                  <a:lnTo>
-                    <a:pt x="2075558" y="1946342"/>
-                  </a:lnTo>
-                  <a:lnTo>
-                    <a:pt x="2152026" y="1989022"/>
-                  </a:lnTo>
-                  <a:lnTo>
-                    <a:pt x="2228495" y="2030262"/>
-                  </a:lnTo>
-                  <a:lnTo>
-                    <a:pt x="2304963" y="2070110"/>
-                  </a:lnTo>
-                  <a:lnTo>
-                    <a:pt x="2381432" y="2108614"/>
-                  </a:lnTo>
-                  <a:lnTo>
-                    <a:pt x="2457900" y="2145820"/>
-                  </a:lnTo>
-                  <a:lnTo>
-                    <a:pt x="2534369" y="2181770"/>
-                  </a:lnTo>
-                  <a:lnTo>
-                    <a:pt x="2610837" y="2216507"/>
-                  </a:lnTo>
-                  <a:lnTo>
-                    <a:pt x="2687306" y="2250073"/>
-                  </a:lnTo>
-                  <a:lnTo>
-                    <a:pt x="2763774" y="2282506"/>
-                  </a:lnTo>
-                  <a:lnTo>
-                    <a:pt x="2840242" y="2313844"/>
-                  </a:lnTo>
-                  <a:lnTo>
-                    <a:pt x="2916711" y="2344126"/>
-                  </a:lnTo>
-                  <a:lnTo>
-                    <a:pt x="2993179" y="2373386"/>
-                  </a:lnTo>
-                  <a:lnTo>
-                    <a:pt x="3069648" y="2401659"/>
-                  </a:lnTo>
-                  <a:lnTo>
-                    <a:pt x="3146116" y="2428978"/>
-                  </a:lnTo>
-                  <a:lnTo>
-                    <a:pt x="3222585" y="2455375"/>
-                  </a:lnTo>
-                  <a:lnTo>
-                    <a:pt x="3299053" y="2480882"/>
-                  </a:lnTo>
-                  <a:lnTo>
-                    <a:pt x="3375521" y="2505528"/>
-                  </a:lnTo>
-                  <a:lnTo>
-                    <a:pt x="3451990" y="2529343"/>
-                  </a:lnTo>
-                  <a:lnTo>
-                    <a:pt x="3528458" y="2552355"/>
-                  </a:lnTo>
-                  <a:lnTo>
-                    <a:pt x="3604927" y="2574590"/>
-                  </a:lnTo>
-                  <a:lnTo>
-                    <a:pt x="3681395" y="2596075"/>
-                  </a:lnTo>
-                  <a:lnTo>
-                    <a:pt x="3757864" y="2616835"/>
-                  </a:lnTo>
-                  <a:lnTo>
-                    <a:pt x="3834332" y="2636895"/>
-                  </a:lnTo>
-                  <a:lnTo>
-                    <a:pt x="3910800" y="2656278"/>
-                  </a:lnTo>
-                  <a:lnTo>
-                    <a:pt x="3987269" y="2675007"/>
-                  </a:lnTo>
-                  <a:lnTo>
-                    <a:pt x="4063737" y="2693104"/>
-                  </a:lnTo>
-                  <a:lnTo>
-                    <a:pt x="4140206" y="2710591"/>
-                  </a:lnTo>
-                  <a:lnTo>
-                    <a:pt x="4216674" y="2727488"/>
-                  </a:lnTo>
-                  <a:lnTo>
-                    <a:pt x="4293143" y="2743814"/>
-                  </a:lnTo>
-                  <a:lnTo>
-                    <a:pt x="4369611" y="2759590"/>
-                  </a:lnTo>
-                  <a:lnTo>
-                    <a:pt x="4446079" y="2774834"/>
-                  </a:lnTo>
-                  <a:lnTo>
-                    <a:pt x="4522548" y="2789564"/>
-                  </a:lnTo>
-                  <a:lnTo>
-                    <a:pt x="4599016" y="2803796"/>
-                  </a:lnTo>
-                  <a:lnTo>
-                    <a:pt x="4675485" y="2817548"/>
-                  </a:lnTo>
-                  <a:lnTo>
-                    <a:pt x="4751953" y="2830837"/>
-                  </a:lnTo>
-                  <a:lnTo>
-                    <a:pt x="4828422" y="2843677"/>
-                  </a:lnTo>
-                  <a:lnTo>
-                    <a:pt x="4904890" y="2856084"/>
-                  </a:lnTo>
-                  <a:lnTo>
-                    <a:pt x="4981359" y="2868072"/>
-                  </a:lnTo>
-                  <a:lnTo>
-                    <a:pt x="5057827" y="2879656"/>
-                  </a:lnTo>
-                  <a:lnTo>
-                    <a:pt x="5134295" y="2890849"/>
-                  </a:lnTo>
-                  <a:lnTo>
-                    <a:pt x="5210764" y="2901665"/>
-                  </a:lnTo>
-                  <a:lnTo>
-                    <a:pt x="5287232" y="2912116"/>
-                  </a:lnTo>
-                  <a:lnTo>
-                    <a:pt x="5363701" y="2922214"/>
-                  </a:lnTo>
-                  <a:lnTo>
-                    <a:pt x="5440169" y="2931971"/>
-                  </a:lnTo>
-                  <a:lnTo>
-                    <a:pt x="5516638" y="2941399"/>
-                  </a:lnTo>
-                  <a:lnTo>
-                    <a:pt x="5593106" y="2950510"/>
-                  </a:lnTo>
-                  <a:lnTo>
-                    <a:pt x="5669574" y="2959312"/>
-                  </a:lnTo>
-                  <a:lnTo>
-                    <a:pt x="5746043" y="2967818"/>
-                  </a:lnTo>
-                  <a:lnTo>
-                    <a:pt x="5822511" y="2976037"/>
-                  </a:lnTo>
-                  <a:lnTo>
-                    <a:pt x="5898980" y="2983979"/>
-                  </a:lnTo>
-                  <a:lnTo>
-                    <a:pt x="5975448" y="2991652"/>
-                  </a:lnTo>
-                  <a:lnTo>
-                    <a:pt x="6051917" y="2999067"/>
-                  </a:lnTo>
-                  <a:lnTo>
-                    <a:pt x="6128385" y="3006232"/>
-                  </a:lnTo>
-                  <a:lnTo>
-                    <a:pt x="6204853" y="3013155"/>
-                  </a:lnTo>
-                  <a:lnTo>
-                    <a:pt x="6281322" y="3019844"/>
-                  </a:lnTo>
-                  <a:lnTo>
-                    <a:pt x="6357790" y="3026308"/>
-                  </a:lnTo>
-                  <a:lnTo>
-                    <a:pt x="6434259" y="3032554"/>
-                  </a:lnTo>
-                  <a:lnTo>
-                    <a:pt x="6510727" y="3038588"/>
-                  </a:lnTo>
-                  <a:lnTo>
-                    <a:pt x="6587196" y="3044420"/>
-                  </a:lnTo>
-                  <a:lnTo>
-                    <a:pt x="6663664" y="3050054"/>
-                  </a:lnTo>
-                  <a:lnTo>
-                    <a:pt x="6740132" y="3055499"/>
-                  </a:lnTo>
-                  <a:lnTo>
-                    <a:pt x="6816601" y="3060760"/>
-                  </a:lnTo>
-                  <a:lnTo>
-                    <a:pt x="6893069" y="3065843"/>
-                  </a:lnTo>
-                  <a:lnTo>
-                    <a:pt x="6969538" y="3070755"/>
-                  </a:lnTo>
-                  <a:lnTo>
-                    <a:pt x="7046006" y="3075501"/>
-                  </a:lnTo>
-                  <a:lnTo>
-                    <a:pt x="7122475" y="3080087"/>
+                    <a:pt x="10910" y="16219"/>
+                  </a:lnTo>
+                  <a:lnTo>
+                    <a:pt x="87379" y="126058"/>
+                  </a:lnTo>
+                  <a:lnTo>
+                    <a:pt x="163847" y="232191"/>
+                  </a:lnTo>
+                  <a:lnTo>
+                    <a:pt x="240316" y="334743"/>
+                  </a:lnTo>
+                  <a:lnTo>
+                    <a:pt x="316784" y="433836"/>
+                  </a:lnTo>
+                  <a:lnTo>
+                    <a:pt x="393253" y="529586"/>
+                  </a:lnTo>
+                  <a:lnTo>
+                    <a:pt x="469721" y="622105"/>
+                  </a:lnTo>
+                  <a:lnTo>
+                    <a:pt x="546189" y="711504"/>
+                  </a:lnTo>
+                  <a:lnTo>
+                    <a:pt x="622658" y="797886"/>
+                  </a:lnTo>
+                  <a:lnTo>
+                    <a:pt x="699126" y="881354"/>
+                  </a:lnTo>
+                  <a:lnTo>
+                    <a:pt x="775595" y="962006"/>
+                  </a:lnTo>
+                  <a:lnTo>
+                    <a:pt x="852063" y="1039937"/>
+                  </a:lnTo>
+                  <a:lnTo>
+                    <a:pt x="928532" y="1115239"/>
+                  </a:lnTo>
+                  <a:lnTo>
+                    <a:pt x="1005000" y="1188001"/>
+                  </a:lnTo>
+                  <a:lnTo>
+                    <a:pt x="1081468" y="1258308"/>
+                  </a:lnTo>
+                  <a:lnTo>
+                    <a:pt x="1157937" y="1326243"/>
+                  </a:lnTo>
+                  <a:lnTo>
+                    <a:pt x="1234405" y="1391886"/>
+                  </a:lnTo>
+                  <a:lnTo>
+                    <a:pt x="1310874" y="1455315"/>
+                  </a:lnTo>
+                  <a:lnTo>
+                    <a:pt x="1387342" y="1516604"/>
+                  </a:lnTo>
+                  <a:lnTo>
+                    <a:pt x="1463811" y="1575825"/>
+                  </a:lnTo>
+                  <a:lnTo>
+                    <a:pt x="1540279" y="1633048"/>
+                  </a:lnTo>
+                  <a:lnTo>
+                    <a:pt x="1616747" y="1688341"/>
+                  </a:lnTo>
+                  <a:lnTo>
+                    <a:pt x="1693216" y="1741768"/>
+                  </a:lnTo>
+                  <a:lnTo>
+                    <a:pt x="1769684" y="1793393"/>
+                  </a:lnTo>
+                  <a:lnTo>
+                    <a:pt x="1846153" y="1843276"/>
+                  </a:lnTo>
+                  <a:lnTo>
+                    <a:pt x="1922621" y="1891477"/>
+                  </a:lnTo>
+                  <a:lnTo>
+                    <a:pt x="1999090" y="1938051"/>
+                  </a:lnTo>
+                  <a:lnTo>
+                    <a:pt x="2075558" y="1983054"/>
+                  </a:lnTo>
+                  <a:lnTo>
+                    <a:pt x="2152026" y="2026539"/>
+                  </a:lnTo>
+                  <a:lnTo>
+                    <a:pt x="2228495" y="2068557"/>
+                  </a:lnTo>
+                  <a:lnTo>
+                    <a:pt x="2304963" y="2109157"/>
+                  </a:lnTo>
+                  <a:lnTo>
+                    <a:pt x="2381432" y="2148388"/>
+                  </a:lnTo>
+                  <a:lnTo>
+                    <a:pt x="2457900" y="2186295"/>
+                  </a:lnTo>
+                  <a:lnTo>
+                    <a:pt x="2534369" y="2222923"/>
+                  </a:lnTo>
+                  <a:lnTo>
+                    <a:pt x="2610837" y="2258315"/>
+                  </a:lnTo>
+                  <a:lnTo>
+                    <a:pt x="2687306" y="2292514"/>
+                  </a:lnTo>
+                  <a:lnTo>
+                    <a:pt x="2763774" y="2325559"/>
+                  </a:lnTo>
+                  <a:lnTo>
+                    <a:pt x="2840242" y="2357489"/>
+                  </a:lnTo>
+                  <a:lnTo>
+                    <a:pt x="2916711" y="2388341"/>
+                  </a:lnTo>
+                  <a:lnTo>
+                    <a:pt x="2993179" y="2418153"/>
+                  </a:lnTo>
+                  <a:lnTo>
+                    <a:pt x="3069648" y="2446959"/>
+                  </a:lnTo>
+                  <a:lnTo>
+                    <a:pt x="3146116" y="2474794"/>
+                  </a:lnTo>
+                  <a:lnTo>
+                    <a:pt x="3222585" y="2501689"/>
+                  </a:lnTo>
+                  <a:lnTo>
+                    <a:pt x="3299053" y="2527677"/>
+                  </a:lnTo>
+                  <a:lnTo>
+                    <a:pt x="3375521" y="2552788"/>
+                  </a:lnTo>
+                  <a:lnTo>
+                    <a:pt x="3451990" y="2577052"/>
+                  </a:lnTo>
+                  <a:lnTo>
+                    <a:pt x="3528458" y="2600498"/>
+                  </a:lnTo>
+                  <a:lnTo>
+                    <a:pt x="3604927" y="2623152"/>
+                  </a:lnTo>
+                  <a:lnTo>
+                    <a:pt x="3681395" y="2645042"/>
+                  </a:lnTo>
+                  <a:lnTo>
+                    <a:pt x="3757864" y="2666194"/>
+                  </a:lnTo>
+                  <a:lnTo>
+                    <a:pt x="3834332" y="2686632"/>
+                  </a:lnTo>
+                  <a:lnTo>
+                    <a:pt x="3910800" y="2706381"/>
+                  </a:lnTo>
+                  <a:lnTo>
+                    <a:pt x="3987269" y="2725463"/>
+                  </a:lnTo>
+                  <a:lnTo>
+                    <a:pt x="4063737" y="2743902"/>
+                  </a:lnTo>
+                  <a:lnTo>
+                    <a:pt x="4140206" y="2761719"/>
+                  </a:lnTo>
+                  <a:lnTo>
+                    <a:pt x="4216674" y="2778934"/>
+                  </a:lnTo>
+                  <a:lnTo>
+                    <a:pt x="4293143" y="2795569"/>
+                  </a:lnTo>
+                  <a:lnTo>
+                    <a:pt x="4369611" y="2811642"/>
+                  </a:lnTo>
+                  <a:lnTo>
+                    <a:pt x="4446079" y="2827174"/>
+                  </a:lnTo>
+                  <a:lnTo>
+                    <a:pt x="4522548" y="2842181"/>
+                  </a:lnTo>
+                  <a:lnTo>
+                    <a:pt x="4599016" y="2856682"/>
+                  </a:lnTo>
+                  <a:lnTo>
+                    <a:pt x="4675485" y="2870694"/>
+                  </a:lnTo>
+                  <a:lnTo>
+                    <a:pt x="4751953" y="2884233"/>
+                  </a:lnTo>
+                  <a:lnTo>
+                    <a:pt x="4828422" y="2897315"/>
+                  </a:lnTo>
+                  <a:lnTo>
+                    <a:pt x="4904890" y="2909956"/>
+                  </a:lnTo>
+                  <a:lnTo>
+                    <a:pt x="4981359" y="2922171"/>
+                  </a:lnTo>
+                  <a:lnTo>
+                    <a:pt x="5057827" y="2933973"/>
+                  </a:lnTo>
+                  <a:lnTo>
+                    <a:pt x="5134295" y="2945377"/>
+                  </a:lnTo>
+                  <a:lnTo>
+                    <a:pt x="5210764" y="2956397"/>
+                  </a:lnTo>
+                  <a:lnTo>
+                    <a:pt x="5287232" y="2967045"/>
+                  </a:lnTo>
+                  <a:lnTo>
+                    <a:pt x="5363701" y="2977333"/>
+                  </a:lnTo>
+                  <a:lnTo>
+                    <a:pt x="5440169" y="2987275"/>
+                  </a:lnTo>
+                  <a:lnTo>
+                    <a:pt x="5516638" y="2996881"/>
+                  </a:lnTo>
+                  <a:lnTo>
+                    <a:pt x="5593106" y="3006163"/>
+                  </a:lnTo>
+                  <a:lnTo>
+                    <a:pt x="5669574" y="3015132"/>
+                  </a:lnTo>
+                  <a:lnTo>
+                    <a:pt x="5746043" y="3023798"/>
+                  </a:lnTo>
+                  <a:lnTo>
+                    <a:pt x="5822511" y="3032172"/>
+                  </a:lnTo>
+                  <a:lnTo>
+                    <a:pt x="5898980" y="3040263"/>
+                  </a:lnTo>
+                  <a:lnTo>
+                    <a:pt x="5975448" y="3048082"/>
+                  </a:lnTo>
+                  <a:lnTo>
+                    <a:pt x="6051917" y="3055636"/>
+                  </a:lnTo>
+                  <a:lnTo>
+                    <a:pt x="6128385" y="3062936"/>
+                  </a:lnTo>
+                  <a:lnTo>
+                    <a:pt x="6204853" y="3069990"/>
+                  </a:lnTo>
+                  <a:lnTo>
+                    <a:pt x="6281322" y="3076805"/>
+                  </a:lnTo>
+                  <a:lnTo>
+                    <a:pt x="6357790" y="3083391"/>
+                  </a:lnTo>
+                  <a:lnTo>
+                    <a:pt x="6434259" y="3089754"/>
+                  </a:lnTo>
+                  <a:lnTo>
+                    <a:pt x="6510727" y="3095903"/>
+                  </a:lnTo>
+                  <a:lnTo>
+                    <a:pt x="6587196" y="3101844"/>
+                  </a:lnTo>
+                  <a:lnTo>
+                    <a:pt x="6663664" y="3107585"/>
+                  </a:lnTo>
+                  <a:lnTo>
+                    <a:pt x="6740132" y="3113132"/>
+                  </a:lnTo>
+                  <a:lnTo>
+                    <a:pt x="6816601" y="3118493"/>
+                  </a:lnTo>
+                  <a:lnTo>
+                    <a:pt x="6893069" y="3123672"/>
+                  </a:lnTo>
+                  <a:lnTo>
+                    <a:pt x="6969538" y="3128676"/>
+                  </a:lnTo>
+                  <a:lnTo>
+                    <a:pt x="7046006" y="3133512"/>
+                  </a:lnTo>
+                  <a:lnTo>
+                    <a:pt x="7122475" y="3138185"/>
                   </a:lnTo>
                 </a:path>
               </a:pathLst>
@@ -4404,13 +4791,13 @@
         </p:sp>
         <p:sp>
           <p:nvSpPr>
-            <p:cNvPr id="25" name="pl25"/>
+            <p:cNvPr id="34" name="pl34"/>
             <p:cNvSpPr/>
             <p:nvPr/>
           </p:nvSpPr>
           <p:spPr>
             <a:xfrm>
-              <a:off x="915645" y="4655980"/>
+              <a:off x="915645" y="4678449"/>
               <a:ext cx="7682587" cy="0"/>
             </a:xfrm>
             <a:custGeom>
@@ -4447,21 +4834,21 @@
         </p:sp>
         <p:sp>
           <p:nvSpPr>
-            <p:cNvPr id="26" name="pl26"/>
+            <p:cNvPr id="35" name="pl35"/>
             <p:cNvSpPr/>
             <p:nvPr/>
           </p:nvSpPr>
           <p:spPr>
             <a:xfrm>
-              <a:off x="4250960" y="2209169"/>
-              <a:ext cx="0" cy="3364365"/>
+              <a:off x="4250960" y="2185486"/>
+              <a:ext cx="0" cy="3427824"/>
             </a:xfrm>
             <a:custGeom>
               <a:avLst/>
               <a:pathLst>
-                <a:path w="0" h="3364365">
+                <a:path w="0" h="3427824">
                   <a:moveTo>
-                    <a:pt x="0" y="3364365"/>
+                    <a:pt x="0" y="3427824"/>
                   </a:moveTo>
                   <a:lnTo>
                     <a:pt x="0" y="0"/>
@@ -4490,13 +4877,13 @@
         </p:sp>
         <p:sp>
           <p:nvSpPr>
-            <p:cNvPr id="27" name="tx27"/>
+            <p:cNvPr id="36" name="tx36"/>
             <p:cNvSpPr/>
             <p:nvPr/>
           </p:nvSpPr>
           <p:spPr>
             <a:xfrm>
-              <a:off x="756929" y="5369631"/>
+              <a:off x="756929" y="5406523"/>
               <a:ext cx="79004" cy="101955"/>
             </a:xfrm>
             <a:prstGeom prst="rect">
@@ -4536,13 +4923,13 @@
         </p:sp>
         <p:sp>
           <p:nvSpPr>
-            <p:cNvPr id="28" name="tx28"/>
+            <p:cNvPr id="37" name="tx37"/>
             <p:cNvSpPr/>
             <p:nvPr/>
           </p:nvSpPr>
           <p:spPr>
             <a:xfrm>
-              <a:off x="756929" y="4605002"/>
+              <a:off x="756929" y="4627472"/>
               <a:ext cx="79004" cy="101955"/>
             </a:xfrm>
             <a:prstGeom prst="rect">
@@ -4582,13 +4969,13 @@
         </p:sp>
         <p:sp>
           <p:nvSpPr>
-            <p:cNvPr id="29" name="tx29"/>
+            <p:cNvPr id="38" name="tx38"/>
             <p:cNvSpPr/>
             <p:nvPr/>
           </p:nvSpPr>
           <p:spPr>
             <a:xfrm>
-              <a:off x="756929" y="3840374"/>
+              <a:off x="756929" y="3848420"/>
               <a:ext cx="79004" cy="101955"/>
             </a:xfrm>
             <a:prstGeom prst="rect">
@@ -4628,13 +5015,13 @@
         </p:sp>
         <p:sp>
           <p:nvSpPr>
-            <p:cNvPr id="30" name="tx30"/>
+            <p:cNvPr id="39" name="tx39"/>
             <p:cNvSpPr/>
             <p:nvPr/>
           </p:nvSpPr>
           <p:spPr>
             <a:xfrm>
-              <a:off x="756929" y="3075745"/>
+              <a:off x="756929" y="3069369"/>
               <a:ext cx="79004" cy="101955"/>
             </a:xfrm>
             <a:prstGeom prst="rect">
@@ -4674,13 +5061,13 @@
         </p:sp>
         <p:sp>
           <p:nvSpPr>
-            <p:cNvPr id="31" name="tx31"/>
+            <p:cNvPr id="40" name="tx40"/>
             <p:cNvSpPr/>
             <p:nvPr/>
           </p:nvSpPr>
           <p:spPr>
             <a:xfrm>
-              <a:off x="756929" y="2311117"/>
+              <a:off x="756929" y="2290318"/>
               <a:ext cx="79004" cy="101955"/>
             </a:xfrm>
             <a:prstGeom prst="rect">
@@ -4720,14 +5107,14 @@
         </p:sp>
         <p:sp>
           <p:nvSpPr>
-            <p:cNvPr id="32" name="tx32"/>
+            <p:cNvPr id="41" name="tx41"/>
             <p:cNvSpPr/>
             <p:nvPr/>
           </p:nvSpPr>
           <p:spPr>
             <a:xfrm>
-              <a:off x="2451993" y="5653245"/>
-              <a:ext cx="244784" cy="101955"/>
+              <a:off x="1598722" y="5693022"/>
+              <a:ext cx="205282" cy="101955"/>
             </a:xfrm>
             <a:prstGeom prst="rect">
               <a:avLst/>
@@ -4759,21 +5146,21 @@
                   <a:latin typeface="Helvetica"/>
                   <a:cs typeface="Helvetica"/>
                 </a:rPr>
-                <a:t>-0.2</a:t>
+                <a:t>-30</a:t>
               </a:r>
             </a:p>
           </p:txBody>
         </p:sp>
         <p:sp>
           <p:nvSpPr>
-            <p:cNvPr id="33" name="tx33"/>
+            <p:cNvPr id="42" name="tx42"/>
             <p:cNvSpPr/>
             <p:nvPr/>
           </p:nvSpPr>
           <p:spPr>
             <a:xfrm>
-              <a:off x="4221672" y="5653245"/>
-              <a:ext cx="197510" cy="101955"/>
+              <a:off x="2471744" y="5693022"/>
+              <a:ext cx="205282" cy="101955"/>
             </a:xfrm>
             <a:prstGeom prst="rect">
               <a:avLst/>
@@ -4805,21 +5192,21 @@
                   <a:latin typeface="Helvetica"/>
                   <a:cs typeface="Helvetica"/>
                 </a:rPr>
-                <a:t>0.0</a:t>
+                <a:t>-20</a:t>
               </a:r>
             </a:p>
           </p:txBody>
         </p:sp>
         <p:sp>
           <p:nvSpPr>
-            <p:cNvPr id="34" name="tx34"/>
+            <p:cNvPr id="43" name="tx43"/>
             <p:cNvSpPr/>
             <p:nvPr/>
           </p:nvSpPr>
           <p:spPr>
             <a:xfrm>
-              <a:off x="5967715" y="5653245"/>
-              <a:ext cx="197510" cy="101955"/>
+              <a:off x="3344765" y="5693022"/>
+              <a:ext cx="205282" cy="101955"/>
             </a:xfrm>
             <a:prstGeom prst="rect">
               <a:avLst/>
@@ -4851,21 +5238,21 @@
                   <a:latin typeface="Helvetica"/>
                   <a:cs typeface="Helvetica"/>
                 </a:rPr>
-                <a:t>0.2</a:t>
+                <a:t>-10</a:t>
               </a:r>
             </a:p>
           </p:txBody>
         </p:sp>
         <p:sp>
           <p:nvSpPr>
-            <p:cNvPr id="35" name="tx35"/>
+            <p:cNvPr id="44" name="tx44"/>
             <p:cNvSpPr/>
             <p:nvPr/>
           </p:nvSpPr>
           <p:spPr>
             <a:xfrm>
-              <a:off x="7713757" y="5653245"/>
-              <a:ext cx="197510" cy="101955"/>
+              <a:off x="4280925" y="5693022"/>
+              <a:ext cx="79004" cy="101955"/>
             </a:xfrm>
             <a:prstGeom prst="rect">
               <a:avLst/>
@@ -4897,21 +5284,205 @@
                   <a:latin typeface="Helvetica"/>
                   <a:cs typeface="Helvetica"/>
                 </a:rPr>
-                <a:t>0.4</a:t>
+                <a:t>0</a:t>
               </a:r>
             </a:p>
           </p:txBody>
         </p:sp>
         <p:sp>
           <p:nvSpPr>
-            <p:cNvPr id="36" name="tx36"/>
+            <p:cNvPr id="45" name="tx45"/>
             <p:cNvSpPr/>
             <p:nvPr/>
           </p:nvSpPr>
           <p:spPr>
             <a:xfrm>
-              <a:off x="2688337" y="5834415"/>
-              <a:ext cx="2138873" cy="127558"/>
+              <a:off x="5114445" y="5693022"/>
+              <a:ext cx="158008" cy="101955"/>
+            </a:xfrm>
+            <a:prstGeom prst="rect">
+              <a:avLst/>
+            </a:prstGeom>
+            <a:noFill/>
+          </p:spPr>
+          <p:txBody>
+            <a:bodyPr lIns="0" rIns="0" tIns="0" bIns="0" anchorCtr="1" anchor="ctr" wrap="none"/>
+            <a:lstStyle/>
+            <a:p>
+              <a:pPr algn="l" marL="0" marR="0" indent="0">
+                <a:lnSpc>
+                  <a:spcPts val="1120"/>
+                </a:lnSpc>
+                <a:spcBef>
+                  <a:spcPts val="0"/>
+                </a:spcBef>
+                <a:spcAft>
+                  <a:spcPts val="0"/>
+                </a:spcAft>
+              </a:pPr>
+              <a:r>
+                <a:rPr sz="1120">
+                  <a:solidFill>
+                    <a:srgbClr val="4D4D4D">
+                      <a:alpha val="100000"/>
+                    </a:srgbClr>
+                  </a:solidFill>
+                  <a:latin typeface="Helvetica"/>
+                  <a:cs typeface="Helvetica"/>
+                </a:rPr>
+                <a:t>10</a:t>
+              </a:r>
+            </a:p>
+          </p:txBody>
+        </p:sp>
+        <p:sp>
+          <p:nvSpPr>
+            <p:cNvPr id="46" name="tx46"/>
+            <p:cNvSpPr/>
+            <p:nvPr/>
+          </p:nvSpPr>
+          <p:spPr>
+            <a:xfrm>
+              <a:off x="5987466" y="5693022"/>
+              <a:ext cx="158008" cy="101955"/>
+            </a:xfrm>
+            <a:prstGeom prst="rect">
+              <a:avLst/>
+            </a:prstGeom>
+            <a:noFill/>
+          </p:spPr>
+          <p:txBody>
+            <a:bodyPr lIns="0" rIns="0" tIns="0" bIns="0" anchorCtr="1" anchor="ctr" wrap="none"/>
+            <a:lstStyle/>
+            <a:p>
+              <a:pPr algn="l" marL="0" marR="0" indent="0">
+                <a:lnSpc>
+                  <a:spcPts val="1120"/>
+                </a:lnSpc>
+                <a:spcBef>
+                  <a:spcPts val="0"/>
+                </a:spcBef>
+                <a:spcAft>
+                  <a:spcPts val="0"/>
+                </a:spcAft>
+              </a:pPr>
+              <a:r>
+                <a:rPr sz="1120">
+                  <a:solidFill>
+                    <a:srgbClr val="4D4D4D">
+                      <a:alpha val="100000"/>
+                    </a:srgbClr>
+                  </a:solidFill>
+                  <a:latin typeface="Helvetica"/>
+                  <a:cs typeface="Helvetica"/>
+                </a:rPr>
+                <a:t>20</a:t>
+              </a:r>
+            </a:p>
+          </p:txBody>
+        </p:sp>
+        <p:sp>
+          <p:nvSpPr>
+            <p:cNvPr id="47" name="tx47"/>
+            <p:cNvSpPr/>
+            <p:nvPr/>
+          </p:nvSpPr>
+          <p:spPr>
+            <a:xfrm>
+              <a:off x="6860487" y="5693022"/>
+              <a:ext cx="158008" cy="101955"/>
+            </a:xfrm>
+            <a:prstGeom prst="rect">
+              <a:avLst/>
+            </a:prstGeom>
+            <a:noFill/>
+          </p:spPr>
+          <p:txBody>
+            <a:bodyPr lIns="0" rIns="0" tIns="0" bIns="0" anchorCtr="1" anchor="ctr" wrap="none"/>
+            <a:lstStyle/>
+            <a:p>
+              <a:pPr algn="l" marL="0" marR="0" indent="0">
+                <a:lnSpc>
+                  <a:spcPts val="1120"/>
+                </a:lnSpc>
+                <a:spcBef>
+                  <a:spcPts val="0"/>
+                </a:spcBef>
+                <a:spcAft>
+                  <a:spcPts val="0"/>
+                </a:spcAft>
+              </a:pPr>
+              <a:r>
+                <a:rPr sz="1120">
+                  <a:solidFill>
+                    <a:srgbClr val="4D4D4D">
+                      <a:alpha val="100000"/>
+                    </a:srgbClr>
+                  </a:solidFill>
+                  <a:latin typeface="Helvetica"/>
+                  <a:cs typeface="Helvetica"/>
+                </a:rPr>
+                <a:t>30</a:t>
+              </a:r>
+            </a:p>
+          </p:txBody>
+        </p:sp>
+        <p:sp>
+          <p:nvSpPr>
+            <p:cNvPr id="48" name="tx48"/>
+            <p:cNvSpPr/>
+            <p:nvPr/>
+          </p:nvSpPr>
+          <p:spPr>
+            <a:xfrm>
+              <a:off x="7733508" y="5693022"/>
+              <a:ext cx="158008" cy="101955"/>
+            </a:xfrm>
+            <a:prstGeom prst="rect">
+              <a:avLst/>
+            </a:prstGeom>
+            <a:noFill/>
+          </p:spPr>
+          <p:txBody>
+            <a:bodyPr lIns="0" rIns="0" tIns="0" bIns="0" anchorCtr="1" anchor="ctr" wrap="none"/>
+            <a:lstStyle/>
+            <a:p>
+              <a:pPr algn="l" marL="0" marR="0" indent="0">
+                <a:lnSpc>
+                  <a:spcPts val="1120"/>
+                </a:lnSpc>
+                <a:spcBef>
+                  <a:spcPts val="0"/>
+                </a:spcBef>
+                <a:spcAft>
+                  <a:spcPts val="0"/>
+                </a:spcAft>
+              </a:pPr>
+              <a:r>
+                <a:rPr sz="1120">
+                  <a:solidFill>
+                    <a:srgbClr val="4D4D4D">
+                      <a:alpha val="100000"/>
+                    </a:srgbClr>
+                  </a:solidFill>
+                  <a:latin typeface="Helvetica"/>
+                  <a:cs typeface="Helvetica"/>
+                </a:rPr>
+                <a:t>40</a:t>
+              </a:r>
+            </a:p>
+          </p:txBody>
+        </p:sp>
+        <p:sp>
+          <p:nvSpPr>
+            <p:cNvPr id="49" name="tx49"/>
+            <p:cNvSpPr/>
+            <p:nvPr/>
+          </p:nvSpPr>
+          <p:spPr>
+            <a:xfrm>
+              <a:off x="3941888" y="5870717"/>
+              <a:ext cx="1630100" cy="127558"/>
             </a:xfrm>
             <a:prstGeom prst="rect">
               <a:avLst/>
@@ -4943,572 +5514,20 @@
                   <a:latin typeface="Helvetica"/>
                   <a:cs typeface="Helvetica"/>
                 </a:rPr>
-                <a:t>eGFR difference  =  (eGFR</a:t>
+                <a:t>eGFR difference (%)</a:t>
               </a:r>
             </a:p>
           </p:txBody>
         </p:sp>
         <p:sp>
           <p:nvSpPr>
-            <p:cNvPr id="37" name="tx37"/>
-            <p:cNvSpPr/>
-            <p:nvPr/>
-          </p:nvSpPr>
-          <p:spPr>
-            <a:xfrm>
-              <a:off x="4827210" y="5905308"/>
-              <a:ext cx="89885" cy="89245"/>
-            </a:xfrm>
-            <a:prstGeom prst="rect">
-              <a:avLst/>
-            </a:prstGeom>
-            <a:noFill/>
-          </p:spPr>
-          <p:txBody>
-            <a:bodyPr lIns="0" rIns="0" tIns="0" bIns="0" anchorCtr="1" anchor="ctr" wrap="none"/>
-            <a:lstStyle/>
-            <a:p>
-              <a:pPr algn="l" marL="0" marR="0" indent="0">
-                <a:lnSpc>
-                  <a:spcPts val="979"/>
-                </a:lnSpc>
-                <a:spcBef>
-                  <a:spcPts val="0"/>
-                </a:spcBef>
-                <a:spcAft>
-                  <a:spcPts val="0"/>
-                </a:spcAft>
-              </a:pPr>
-              <a:r>
-                <a:rPr sz="979">
-                  <a:solidFill>
-                    <a:srgbClr val="000000">
-                      <a:alpha val="100000"/>
-                    </a:srgbClr>
-                  </a:solidFill>
-                  <a:latin typeface="Helvetica"/>
-                  <a:cs typeface="Helvetica"/>
-                </a:rPr>
-                <a:t>C</a:t>
-              </a:r>
-            </a:p>
-          </p:txBody>
-        </p:sp>
-        <p:sp>
-          <p:nvSpPr>
-            <p:cNvPr id="38" name="tx38"/>
-            <p:cNvSpPr/>
-            <p:nvPr/>
-          </p:nvSpPr>
-          <p:spPr>
-            <a:xfrm>
-              <a:off x="4917095" y="5905308"/>
-              <a:ext cx="89885" cy="89245"/>
-            </a:xfrm>
-            <a:prstGeom prst="rect">
-              <a:avLst/>
-            </a:prstGeom>
-            <a:noFill/>
-          </p:spPr>
-          <p:txBody>
-            <a:bodyPr lIns="0" rIns="0" tIns="0" bIns="0" anchorCtr="1" anchor="ctr" wrap="none"/>
-            <a:lstStyle/>
-            <a:p>
-              <a:pPr algn="l" marL="0" marR="0" indent="0">
-                <a:lnSpc>
-                  <a:spcPts val="979"/>
-                </a:lnSpc>
-                <a:spcBef>
-                  <a:spcPts val="0"/>
-                </a:spcBef>
-                <a:spcAft>
-                  <a:spcPts val="0"/>
-                </a:spcAft>
-              </a:pPr>
-              <a:r>
-                <a:rPr sz="979">
-                  <a:solidFill>
-                    <a:srgbClr val="000000">
-                      <a:alpha val="100000"/>
-                    </a:srgbClr>
-                  </a:solidFill>
-                  <a:latin typeface="Helvetica"/>
-                  <a:cs typeface="Helvetica"/>
-                </a:rPr>
-                <a:t>R</a:t>
-              </a:r>
-            </a:p>
-          </p:txBody>
-        </p:sp>
-        <p:sp>
-          <p:nvSpPr>
-            <p:cNvPr id="39" name="tx39"/>
-            <p:cNvSpPr/>
-            <p:nvPr/>
-          </p:nvSpPr>
-          <p:spPr>
-            <a:xfrm>
-              <a:off x="5006981" y="5884826"/>
-              <a:ext cx="68305" cy="109728"/>
-            </a:xfrm>
-            <a:prstGeom prst="rect">
-              <a:avLst/>
-            </a:prstGeom>
-            <a:noFill/>
-          </p:spPr>
-          <p:txBody>
-            <a:bodyPr lIns="0" rIns="0" tIns="0" bIns="0" anchorCtr="1" anchor="ctr" wrap="none"/>
-            <a:lstStyle/>
-            <a:p>
-              <a:pPr algn="l" marL="0" marR="0" indent="0">
-                <a:lnSpc>
-                  <a:spcPts val="979"/>
-                </a:lnSpc>
-                <a:spcBef>
-                  <a:spcPts val="0"/>
-                </a:spcBef>
-                <a:spcAft>
-                  <a:spcPts val="0"/>
-                </a:spcAft>
-              </a:pPr>
-              <a:r>
-                <a:rPr sz="979">
-                  <a:solidFill>
-                    <a:srgbClr val="000000">
-                      <a:alpha val="100000"/>
-                    </a:srgbClr>
-                  </a:solidFill>
-                  <a:latin typeface="Symbol"/>
-                  <a:cs typeface="Symbol"/>
-                </a:rPr>
-                <a:t>−</a:t>
-              </a:r>
-            </a:p>
-          </p:txBody>
-        </p:sp>
-        <p:sp>
-          <p:nvSpPr>
-            <p:cNvPr id="40" name="tx40"/>
-            <p:cNvSpPr/>
-            <p:nvPr/>
-          </p:nvSpPr>
-          <p:spPr>
-            <a:xfrm>
-              <a:off x="5075286" y="5905308"/>
-              <a:ext cx="89885" cy="89245"/>
-            </a:xfrm>
-            <a:prstGeom prst="rect">
-              <a:avLst/>
-            </a:prstGeom>
-            <a:noFill/>
-          </p:spPr>
-          <p:txBody>
-            <a:bodyPr lIns="0" rIns="0" tIns="0" bIns="0" anchorCtr="1" anchor="ctr" wrap="none"/>
-            <a:lstStyle/>
-            <a:p>
-              <a:pPr algn="l" marL="0" marR="0" indent="0">
-                <a:lnSpc>
-                  <a:spcPts val="979"/>
-                </a:lnSpc>
-                <a:spcBef>
-                  <a:spcPts val="0"/>
-                </a:spcBef>
-                <a:spcAft>
-                  <a:spcPts val="0"/>
-                </a:spcAft>
-              </a:pPr>
-              <a:r>
-                <a:rPr sz="979">
-                  <a:solidFill>
-                    <a:srgbClr val="000000">
-                      <a:alpha val="100000"/>
-                    </a:srgbClr>
-                  </a:solidFill>
-                  <a:latin typeface="Helvetica"/>
-                  <a:cs typeface="Helvetica"/>
-                </a:rPr>
-                <a:t>C</a:t>
-              </a:r>
-            </a:p>
-          </p:txBody>
-        </p:sp>
-        <p:sp>
-          <p:nvSpPr>
-            <p:cNvPr id="41" name="tx41"/>
-            <p:cNvSpPr/>
-            <p:nvPr/>
-          </p:nvSpPr>
-          <p:spPr>
-            <a:xfrm>
-              <a:off x="5165172" y="5905308"/>
-              <a:ext cx="83027" cy="89245"/>
-            </a:xfrm>
-            <a:prstGeom prst="rect">
-              <a:avLst/>
-            </a:prstGeom>
-            <a:noFill/>
-          </p:spPr>
-          <p:txBody>
-            <a:bodyPr lIns="0" rIns="0" tIns="0" bIns="0" anchorCtr="1" anchor="ctr" wrap="none"/>
-            <a:lstStyle/>
-            <a:p>
-              <a:pPr algn="l" marL="0" marR="0" indent="0">
-                <a:lnSpc>
-                  <a:spcPts val="979"/>
-                </a:lnSpc>
-                <a:spcBef>
-                  <a:spcPts val="0"/>
-                </a:spcBef>
-                <a:spcAft>
-                  <a:spcPts val="0"/>
-                </a:spcAft>
-              </a:pPr>
-              <a:r>
-                <a:rPr sz="979">
-                  <a:solidFill>
-                    <a:srgbClr val="000000">
-                      <a:alpha val="100000"/>
-                    </a:srgbClr>
-                  </a:solidFill>
-                  <a:latin typeface="Helvetica"/>
-                  <a:cs typeface="Helvetica"/>
-                </a:rPr>
-                <a:t>Y</a:t>
-              </a:r>
-            </a:p>
-          </p:txBody>
-        </p:sp>
-        <p:sp>
-          <p:nvSpPr>
-            <p:cNvPr id="42" name="tx42"/>
-            <p:cNvSpPr/>
-            <p:nvPr/>
-          </p:nvSpPr>
-          <p:spPr>
-            <a:xfrm>
-              <a:off x="5248199" y="5905308"/>
-              <a:ext cx="83027" cy="89245"/>
-            </a:xfrm>
-            <a:prstGeom prst="rect">
-              <a:avLst/>
-            </a:prstGeom>
-            <a:noFill/>
-          </p:spPr>
-          <p:txBody>
-            <a:bodyPr lIns="0" rIns="0" tIns="0" bIns="0" anchorCtr="1" anchor="ctr" wrap="none"/>
-            <a:lstStyle/>
-            <a:p>
-              <a:pPr algn="l" marL="0" marR="0" indent="0">
-                <a:lnSpc>
-                  <a:spcPts val="979"/>
-                </a:lnSpc>
-                <a:spcBef>
-                  <a:spcPts val="0"/>
-                </a:spcBef>
-                <a:spcAft>
-                  <a:spcPts val="0"/>
-                </a:spcAft>
-              </a:pPr>
-              <a:r>
-                <a:rPr sz="979">
-                  <a:solidFill>
-                    <a:srgbClr val="000000">
-                      <a:alpha val="100000"/>
-                    </a:srgbClr>
-                  </a:solidFill>
-                  <a:latin typeface="Helvetica"/>
-                  <a:cs typeface="Helvetica"/>
-                </a:rPr>
-                <a:t>S</a:t>
-              </a:r>
-            </a:p>
-          </p:txBody>
-        </p:sp>
-        <p:sp>
-          <p:nvSpPr>
-            <p:cNvPr id="43" name="tx43"/>
-            <p:cNvSpPr/>
-            <p:nvPr/>
-          </p:nvSpPr>
-          <p:spPr>
-            <a:xfrm>
-              <a:off x="5331227" y="5834415"/>
-              <a:ext cx="558149" cy="127558"/>
-            </a:xfrm>
-            <a:prstGeom prst="rect">
-              <a:avLst/>
-            </a:prstGeom>
-            <a:noFill/>
-          </p:spPr>
-          <p:txBody>
-            <a:bodyPr lIns="0" rIns="0" tIns="0" bIns="0" anchorCtr="1" anchor="ctr" wrap="none"/>
-            <a:lstStyle/>
-            <a:p>
-              <a:pPr algn="l" marL="0" marR="0" indent="0">
-                <a:lnSpc>
-                  <a:spcPts val="1400"/>
-                </a:lnSpc>
-                <a:spcBef>
-                  <a:spcPts val="0"/>
-                </a:spcBef>
-                <a:spcAft>
-                  <a:spcPts val="0"/>
-                </a:spcAft>
-              </a:pPr>
-              <a:r>
-                <a:rPr sz="1400">
-                  <a:solidFill>
-                    <a:srgbClr val="000000">
-                      <a:alpha val="100000"/>
-                    </a:srgbClr>
-                  </a:solidFill>
-                  <a:latin typeface="Helvetica"/>
-                  <a:cs typeface="Helvetica"/>
-                </a:rPr>
-                <a:t> − CrCl</a:t>
-              </a:r>
-            </a:p>
-          </p:txBody>
-        </p:sp>
-        <p:sp>
-          <p:nvSpPr>
-            <p:cNvPr id="44" name="tx44"/>
-            <p:cNvSpPr/>
-            <p:nvPr/>
-          </p:nvSpPr>
-          <p:spPr>
-            <a:xfrm>
-              <a:off x="5889377" y="5905308"/>
-              <a:ext cx="89885" cy="89245"/>
-            </a:xfrm>
-            <a:prstGeom prst="rect">
-              <a:avLst/>
-            </a:prstGeom>
-            <a:noFill/>
-          </p:spPr>
-          <p:txBody>
-            <a:bodyPr lIns="0" rIns="0" tIns="0" bIns="0" anchorCtr="1" anchor="ctr" wrap="none"/>
-            <a:lstStyle/>
-            <a:p>
-              <a:pPr algn="l" marL="0" marR="0" indent="0">
-                <a:lnSpc>
-                  <a:spcPts val="979"/>
-                </a:lnSpc>
-                <a:spcBef>
-                  <a:spcPts val="0"/>
-                </a:spcBef>
-                <a:spcAft>
-                  <a:spcPts val="0"/>
-                </a:spcAft>
-              </a:pPr>
-              <a:r>
-                <a:rPr sz="979">
-                  <a:solidFill>
-                    <a:srgbClr val="000000">
-                      <a:alpha val="100000"/>
-                    </a:srgbClr>
-                  </a:solidFill>
-                  <a:latin typeface="Helvetica"/>
-                  <a:cs typeface="Helvetica"/>
-                </a:rPr>
-                <a:t>C</a:t>
-              </a:r>
-            </a:p>
-          </p:txBody>
-        </p:sp>
-        <p:sp>
-          <p:nvSpPr>
-            <p:cNvPr id="45" name="tx45"/>
-            <p:cNvSpPr/>
-            <p:nvPr/>
-          </p:nvSpPr>
-          <p:spPr>
-            <a:xfrm>
-              <a:off x="5979262" y="5905308"/>
-              <a:ext cx="96743" cy="89245"/>
-            </a:xfrm>
-            <a:prstGeom prst="rect">
-              <a:avLst/>
-            </a:prstGeom>
-            <a:noFill/>
-          </p:spPr>
-          <p:txBody>
-            <a:bodyPr lIns="0" rIns="0" tIns="0" bIns="0" anchorCtr="1" anchor="ctr" wrap="none"/>
-            <a:lstStyle/>
-            <a:p>
-              <a:pPr algn="l" marL="0" marR="0" indent="0">
-                <a:lnSpc>
-                  <a:spcPts val="979"/>
-                </a:lnSpc>
-                <a:spcBef>
-                  <a:spcPts val="0"/>
-                </a:spcBef>
-                <a:spcAft>
-                  <a:spcPts val="0"/>
-                </a:spcAft>
-              </a:pPr>
-              <a:r>
-                <a:rPr sz="979">
-                  <a:solidFill>
-                    <a:srgbClr val="000000">
-                      <a:alpha val="100000"/>
-                    </a:srgbClr>
-                  </a:solidFill>
-                  <a:latin typeface="Helvetica"/>
-                  <a:cs typeface="Helvetica"/>
-                </a:rPr>
-                <a:t>G</a:t>
-              </a:r>
-            </a:p>
-          </p:txBody>
-        </p:sp>
-        <p:sp>
-          <p:nvSpPr>
-            <p:cNvPr id="46" name="tx46"/>
-            <p:cNvSpPr/>
-            <p:nvPr/>
-          </p:nvSpPr>
-          <p:spPr>
-            <a:xfrm>
-              <a:off x="6076006" y="5834415"/>
-              <a:ext cx="562904" cy="127558"/>
-            </a:xfrm>
-            <a:prstGeom prst="rect">
-              <a:avLst/>
-            </a:prstGeom>
-            <a:noFill/>
-          </p:spPr>
-          <p:txBody>
-            <a:bodyPr lIns="0" rIns="0" tIns="0" bIns="0" anchorCtr="1" anchor="ctr" wrap="none"/>
-            <a:lstStyle/>
-            <a:p>
-              <a:pPr algn="l" marL="0" marR="0" indent="0">
-                <a:lnSpc>
-                  <a:spcPts val="1400"/>
-                </a:lnSpc>
-                <a:spcBef>
-                  <a:spcPts val="0"/>
-                </a:spcBef>
-                <a:spcAft>
-                  <a:spcPts val="0"/>
-                </a:spcAft>
-              </a:pPr>
-              <a:r>
-                <a:rPr sz="1400">
-                  <a:solidFill>
-                    <a:srgbClr val="000000">
-                      <a:alpha val="100000"/>
-                    </a:srgbClr>
-                  </a:solidFill>
-                  <a:latin typeface="Helvetica"/>
-                  <a:cs typeface="Helvetica"/>
-                </a:rPr>
-                <a:t>) / CrCl</a:t>
-              </a:r>
-            </a:p>
-          </p:txBody>
-        </p:sp>
-        <p:sp>
-          <p:nvSpPr>
-            <p:cNvPr id="47" name="tx47"/>
-            <p:cNvSpPr/>
-            <p:nvPr/>
-          </p:nvSpPr>
-          <p:spPr>
-            <a:xfrm>
-              <a:off x="6638910" y="5905308"/>
-              <a:ext cx="89885" cy="89245"/>
-            </a:xfrm>
-            <a:prstGeom prst="rect">
-              <a:avLst/>
-            </a:prstGeom>
-            <a:noFill/>
-          </p:spPr>
-          <p:txBody>
-            <a:bodyPr lIns="0" rIns="0" tIns="0" bIns="0" anchorCtr="1" anchor="ctr" wrap="none"/>
-            <a:lstStyle/>
-            <a:p>
-              <a:pPr algn="l" marL="0" marR="0" indent="0">
-                <a:lnSpc>
-                  <a:spcPts val="979"/>
-                </a:lnSpc>
-                <a:spcBef>
-                  <a:spcPts val="0"/>
-                </a:spcBef>
-                <a:spcAft>
-                  <a:spcPts val="0"/>
-                </a:spcAft>
-              </a:pPr>
-              <a:r>
-                <a:rPr sz="979">
-                  <a:solidFill>
-                    <a:srgbClr val="000000">
-                      <a:alpha val="100000"/>
-                    </a:srgbClr>
-                  </a:solidFill>
-                  <a:latin typeface="Helvetica"/>
-                  <a:cs typeface="Helvetica"/>
-                </a:rPr>
-                <a:t>C</a:t>
-              </a:r>
-            </a:p>
-          </p:txBody>
-        </p:sp>
-        <p:sp>
-          <p:nvSpPr>
-            <p:cNvPr id="48" name="tx48"/>
-            <p:cNvSpPr/>
-            <p:nvPr/>
-          </p:nvSpPr>
-          <p:spPr>
-            <a:xfrm>
-              <a:off x="6728796" y="5905308"/>
-              <a:ext cx="96743" cy="89245"/>
-            </a:xfrm>
-            <a:prstGeom prst="rect">
-              <a:avLst/>
-            </a:prstGeom>
-            <a:noFill/>
-          </p:spPr>
-          <p:txBody>
-            <a:bodyPr lIns="0" rIns="0" tIns="0" bIns="0" anchorCtr="1" anchor="ctr" wrap="none"/>
-            <a:lstStyle/>
-            <a:p>
-              <a:pPr algn="l" marL="0" marR="0" indent="0">
-                <a:lnSpc>
-                  <a:spcPts val="979"/>
-                </a:lnSpc>
-                <a:spcBef>
-                  <a:spcPts val="0"/>
-                </a:spcBef>
-                <a:spcAft>
-                  <a:spcPts val="0"/>
-                </a:spcAft>
-              </a:pPr>
-              <a:r>
-                <a:rPr sz="979">
-                  <a:solidFill>
-                    <a:srgbClr val="000000">
-                      <a:alpha val="100000"/>
-                    </a:srgbClr>
-                  </a:solidFill>
-                  <a:latin typeface="Helvetica"/>
-                  <a:cs typeface="Helvetica"/>
-                </a:rPr>
-                <a:t>G</a:t>
-              </a:r>
-            </a:p>
-          </p:txBody>
-        </p:sp>
-        <p:sp>
-          <p:nvSpPr>
-            <p:cNvPr id="49" name="tx49"/>
+            <p:cNvPr id="50" name="tx50"/>
             <p:cNvSpPr/>
             <p:nvPr/>
           </p:nvSpPr>
           <p:spPr>
             <a:xfrm rot="-5400000">
-              <a:off x="-37527" y="3827572"/>
+              <a:off x="-37527" y="3835619"/>
               <a:ext cx="1294150" cy="127558"/>
             </a:xfrm>
             <a:prstGeom prst="rect">
@@ -5548,14 +5567,14 @@
         </p:sp>
         <p:sp>
           <p:nvSpPr>
-            <p:cNvPr id="50" name="tx50"/>
+            <p:cNvPr id="51" name="tx51"/>
             <p:cNvSpPr/>
             <p:nvPr/>
           </p:nvSpPr>
           <p:spPr>
             <a:xfrm>
               <a:off x="915645" y="1977589"/>
-              <a:ext cx="5929701" cy="109362"/>
+              <a:ext cx="3712646" cy="91165"/>
             </a:xfrm>
             <a:prstGeom prst="rect">
               <a:avLst/>
@@ -5568,7 +5587,7 @@
             <a:p>
               <a:pPr algn="l" marL="0" marR="0" indent="0">
                 <a:lnSpc>
-                  <a:spcPts val="1200"/>
+                  <a:spcPts val="1000"/>
                 </a:lnSpc>
                 <a:spcBef>
                   <a:spcPts val="0"/>
@@ -5578,7 +5597,7 @@
                 </a:spcAft>
               </a:pPr>
               <a:r>
-                <a:rPr sz="1200">
+                <a:rPr sz="1000">
                   <a:solidFill>
                     <a:srgbClr val="404040">
                       <a:alpha val="100000"/>
@@ -5587,14 +5606,14 @@
                   <a:latin typeface="Helvetica"/>
                   <a:cs typeface="Helvetica"/>
                 </a:rPr>
-                <a:t>subHR = 0.68 (95% CI 0.42-1.10), p = 0.113   (per 0.1-unit increase in eGFR difference)</a:t>
+                <a:t>subHR = 1.48 (95% CI 0.91-2.40), p = 0.113   (per 10% decrease)</a:t>
               </a:r>
             </a:p>
           </p:txBody>
         </p:sp>
         <p:sp>
           <p:nvSpPr>
-            <p:cNvPr id="51" name="tx51"/>
+            <p:cNvPr id="52" name="tx52"/>
             <p:cNvSpPr/>
             <p:nvPr/>
           </p:nvSpPr>
